--- a/pr3.pptx
+++ b/pr3.pptx
@@ -5,16 +5,16 @@
     <p:sldMasterId id="2147483648" r:id="rId1"/>
   </p:sldMasterIdLst>
   <p:notesMasterIdLst>
-    <p:notesMasterId r:id="rId20"/>
+    <p:notesMasterId r:id="rId21"/>
   </p:notesMasterIdLst>
   <p:handoutMasterIdLst>
-    <p:handoutMasterId r:id="rId21"/>
+    <p:handoutMasterId r:id="rId22"/>
   </p:handoutMasterIdLst>
   <p:sldIdLst>
     <p:sldId id="277" r:id="rId2"/>
-    <p:sldId id="491" r:id="rId3"/>
-    <p:sldId id="333" r:id="rId4"/>
-    <p:sldId id="413" r:id="rId5"/>
+    <p:sldId id="333" r:id="rId3"/>
+    <p:sldId id="413" r:id="rId4"/>
+    <p:sldId id="491" r:id="rId5"/>
     <p:sldId id="374" r:id="rId6"/>
     <p:sldId id="490" r:id="rId7"/>
     <p:sldId id="418" r:id="rId8"/>
@@ -27,30 +27,31 @@
     <p:sldId id="498" r:id="rId15"/>
     <p:sldId id="499" r:id="rId16"/>
     <p:sldId id="500" r:id="rId17"/>
-    <p:sldId id="501" r:id="rId18"/>
-    <p:sldId id="293" r:id="rId19"/>
+    <p:sldId id="502" r:id="rId18"/>
+    <p:sldId id="501" r:id="rId19"/>
+    <p:sldId id="293" r:id="rId20"/>
   </p:sldIdLst>
   <p:sldSz cx="12192000" cy="6858000"/>
   <p:notesSz cx="6858000" cy="9144000"/>
   <p:embeddedFontLst>
     <p:embeddedFont>
       <p:font typeface="Courgette" panose="020B0604020202020204" charset="0"/>
-      <p:regular r:id="rId22"/>
+      <p:regular r:id="rId23"/>
     </p:embeddedFont>
     <p:embeddedFont>
       <p:font typeface="DM Serif Display" panose="020B0604020202020204" charset="0"/>
-      <p:regular r:id="rId23"/>
-      <p:italic r:id="rId24"/>
+      <p:regular r:id="rId24"/>
+      <p:italic r:id="rId25"/>
     </p:embeddedFont>
     <p:embeddedFont>
       <p:font typeface="Malgun Gothic" panose="020B0503020000020004" pitchFamily="34" charset="-127"/>
-      <p:regular r:id="rId25"/>
-      <p:bold r:id="rId26"/>
+      <p:regular r:id="rId26"/>
+      <p:bold r:id="rId27"/>
     </p:embeddedFont>
     <p:embeddedFont>
       <p:font typeface="Montserrat Light" panose="020B0604020202020204" charset="-52"/>
-      <p:regular r:id="rId27"/>
-      <p:italic r:id="rId28"/>
+      <p:regular r:id="rId28"/>
+      <p:italic r:id="rId29"/>
     </p:embeddedFont>
   </p:embeddedFontLst>
   <p:defaultTextStyle>
@@ -5452,52 +5453,6 @@
           </a:p>
         </p:txBody>
       </p:sp>
-      <p:sp>
-        <p:nvSpPr>
-          <p:cNvPr id="7" name="TextBox 6"/>
-          <p:cNvSpPr txBox="1"/>
-          <p:nvPr/>
-        </p:nvSpPr>
-        <p:spPr>
-          <a:xfrm>
-            <a:off x="7200900" y="1116624"/>
-            <a:ext cx="3727938" cy="2031325"/>
-          </a:xfrm>
-          <a:prstGeom prst="rect">
-            <a:avLst/>
-          </a:prstGeom>
-          <a:noFill/>
-        </p:spPr>
-        <p:txBody>
-          <a:bodyPr wrap="square" rtlCol="0">
-            <a:spAutoFit/>
-          </a:bodyPr>
-          <a:lstStyle/>
-          <a:p>
-            <a:r>
-              <a:rPr lang="ru-RU" dirty="0" smtClean="0"/>
-              <a:t>Результат: открывается всплывающее окно с полем для ввода названия новой категории, после введения и нажатия </a:t>
-            </a:r>
-            <a:r>
-              <a:rPr lang="en-US" dirty="0" smtClean="0"/>
-              <a:t>Ok</a:t>
-            </a:r>
-            <a:r>
-              <a:rPr lang="ru-RU" dirty="0" smtClean="0"/>
-              <a:t> добавляется новая категория, при нажатии </a:t>
-            </a:r>
-            <a:r>
-              <a:rPr lang="en-US" dirty="0" smtClean="0"/>
-              <a:t>Cancel </a:t>
-            </a:r>
-            <a:r>
-              <a:rPr lang="ru-RU" dirty="0" smtClean="0"/>
-              <a:t>окно закрывается без изменений.</a:t>
-            </a:r>
-            <a:endParaRPr lang="ru-RU" dirty="0"/>
-          </a:p>
-        </p:txBody>
-      </p:sp>
       <p:pic>
         <p:nvPicPr>
           <p:cNvPr id="2" name="Рисунок 1"/>
@@ -5514,7 +5469,7 @@
         </p:blipFill>
         <p:spPr>
           <a:xfrm>
-            <a:off x="961507" y="1021366"/>
+            <a:off x="1238367" y="1360645"/>
             <a:ext cx="2162477" cy="1390844"/>
           </a:xfrm>
           <a:prstGeom prst="rect">
@@ -5524,7 +5479,7 @@
       </p:pic>
       <p:pic>
         <p:nvPicPr>
-          <p:cNvPr id="4" name="Рисунок 3"/>
+          <p:cNvPr id="3" name="Рисунок 2"/>
           <p:cNvPicPr>
             <a:picLocks noChangeAspect="1"/>
           </p:cNvPicPr>
@@ -5538,8 +5493,32 @@
         </p:blipFill>
         <p:spPr>
           <a:xfrm>
-            <a:off x="961507" y="2688491"/>
-            <a:ext cx="3134162" cy="1762371"/>
+            <a:off x="7791567" y="3905730"/>
+            <a:ext cx="2876951" cy="1562318"/>
+          </a:xfrm>
+          <a:prstGeom prst="rect">
+            <a:avLst/>
+          </a:prstGeom>
+        </p:spPr>
+      </p:pic>
+      <p:pic>
+        <p:nvPicPr>
+          <p:cNvPr id="5" name="Рисунок 4"/>
+          <p:cNvPicPr>
+            <a:picLocks noChangeAspect="1"/>
+          </p:cNvPicPr>
+          <p:nvPr/>
+        </p:nvPicPr>
+        <p:blipFill>
+          <a:blip r:embed="rId4"/>
+          <a:stretch>
+            <a:fillRect/>
+          </a:stretch>
+        </p:blipFill>
+        <p:spPr>
+          <a:xfrm>
+            <a:off x="7791567" y="1501019"/>
+            <a:ext cx="2772162" cy="1505160"/>
           </a:xfrm>
           <a:prstGeom prst="rect">
             <a:avLst/>
@@ -5548,14 +5527,14 @@
       </p:pic>
       <p:sp>
         <p:nvSpPr>
-          <p:cNvPr id="8" name="TextBox 7"/>
+          <p:cNvPr id="9" name="TextBox 8"/>
           <p:cNvSpPr txBox="1"/>
           <p:nvPr/>
         </p:nvSpPr>
         <p:spPr>
           <a:xfrm>
-            <a:off x="7200900" y="3264878"/>
-            <a:ext cx="3727938" cy="923330"/>
+            <a:off x="7811202" y="1131687"/>
+            <a:ext cx="1054100" cy="369332"/>
           </a:xfrm>
           <a:prstGeom prst="rect">
             <a:avLst/>
@@ -5570,7 +5549,37 @@
           <a:p>
             <a:r>
               <a:rPr lang="ru-RU" dirty="0" smtClean="0"/>
-              <a:t>При попытке добавить название уже существующей категории появится ошибка.</a:t>
+              <a:t>До</a:t>
+            </a:r>
+            <a:endParaRPr lang="ru-RU" dirty="0"/>
+          </a:p>
+        </p:txBody>
+      </p:sp>
+      <p:sp>
+        <p:nvSpPr>
+          <p:cNvPr id="10" name="TextBox 9"/>
+          <p:cNvSpPr txBox="1"/>
+          <p:nvPr/>
+        </p:nvSpPr>
+        <p:spPr>
+          <a:xfrm>
+            <a:off x="7811202" y="3449147"/>
+            <a:ext cx="2570480" cy="369332"/>
+          </a:xfrm>
+          <a:prstGeom prst="rect">
+            <a:avLst/>
+          </a:prstGeom>
+          <a:noFill/>
+        </p:spPr>
+        <p:txBody>
+          <a:bodyPr wrap="square" rtlCol="0">
+            <a:spAutoFit/>
+          </a:bodyPr>
+          <a:lstStyle/>
+          <a:p>
+            <a:r>
+              <a:rPr lang="ru-RU" dirty="0" smtClean="0"/>
+              <a:t>После</a:t>
             </a:r>
             <a:endParaRPr lang="ru-RU" dirty="0"/>
           </a:p>
@@ -5586,6 +5595,13 @@
   <p:clrMapOvr>
     <a:masterClrMapping/>
   </p:clrMapOvr>
+  <p:timing>
+    <p:tnLst>
+      <p:par>
+        <p:cTn id="1" dur="indefinite" restart="never" nodeType="tmRoot"/>
+      </p:par>
+    </p:tnLst>
+  </p:timing>
 </p:sld>
 </file>
 
@@ -5640,82 +5656,6 @@
           </a:p>
         </p:txBody>
       </p:sp>
-      <p:sp>
-        <p:nvSpPr>
-          <p:cNvPr id="7" name="TextBox 6"/>
-          <p:cNvSpPr txBox="1"/>
-          <p:nvPr/>
-        </p:nvSpPr>
-        <p:spPr>
-          <a:xfrm>
-            <a:off x="7200900" y="1116624"/>
-            <a:ext cx="3727938" cy="2031325"/>
-          </a:xfrm>
-          <a:prstGeom prst="rect">
-            <a:avLst/>
-          </a:prstGeom>
-          <a:noFill/>
-        </p:spPr>
-        <p:txBody>
-          <a:bodyPr wrap="square" rtlCol="0">
-            <a:spAutoFit/>
-          </a:bodyPr>
-          <a:lstStyle/>
-          <a:p>
-            <a:r>
-              <a:rPr lang="ru-RU" dirty="0" smtClean="0"/>
-              <a:t>Результат: открывается всплывающее окно с полем для ввода названия категории для удаления, после введения и нажатия </a:t>
-            </a:r>
-            <a:r>
-              <a:rPr lang="en-US" dirty="0" smtClean="0"/>
-              <a:t>Ok</a:t>
-            </a:r>
-            <a:r>
-              <a:rPr lang="ru-RU" dirty="0" smtClean="0"/>
-              <a:t> удаляется категория со всеми вещами в ней, при нажатии </a:t>
-            </a:r>
-            <a:r>
-              <a:rPr lang="en-US" dirty="0" smtClean="0"/>
-              <a:t>Cancel </a:t>
-            </a:r>
-            <a:r>
-              <a:rPr lang="ru-RU" dirty="0" smtClean="0"/>
-              <a:t>окно закрывается без изменений.</a:t>
-            </a:r>
-            <a:endParaRPr lang="ru-RU" dirty="0"/>
-          </a:p>
-        </p:txBody>
-      </p:sp>
-      <p:sp>
-        <p:nvSpPr>
-          <p:cNvPr id="8" name="TextBox 7"/>
-          <p:cNvSpPr txBox="1"/>
-          <p:nvPr/>
-        </p:nvSpPr>
-        <p:spPr>
-          <a:xfrm>
-            <a:off x="7200900" y="3264878"/>
-            <a:ext cx="3727938" cy="923330"/>
-          </a:xfrm>
-          <a:prstGeom prst="rect">
-            <a:avLst/>
-          </a:prstGeom>
-          <a:noFill/>
-        </p:spPr>
-        <p:txBody>
-          <a:bodyPr wrap="square" rtlCol="0">
-            <a:spAutoFit/>
-          </a:bodyPr>
-          <a:lstStyle/>
-          <a:p>
-            <a:r>
-              <a:rPr lang="ru-RU" dirty="0" smtClean="0"/>
-              <a:t>При попытке удалить несуществующую категорию появится ошибка.</a:t>
-            </a:r>
-            <a:endParaRPr lang="ru-RU" dirty="0"/>
-          </a:p>
-        </p:txBody>
-      </p:sp>
       <p:pic>
         <p:nvPicPr>
           <p:cNvPr id="5" name="Рисунок 4"/>
@@ -5732,7 +5672,7 @@
         </p:blipFill>
         <p:spPr>
           <a:xfrm>
-            <a:off x="1009138" y="948365"/>
+            <a:off x="1080258" y="1669725"/>
             <a:ext cx="3038899" cy="1514686"/>
           </a:xfrm>
           <a:prstGeom prst="rect">
@@ -5742,7 +5682,7 @@
       </p:pic>
       <p:pic>
         <p:nvPicPr>
-          <p:cNvPr id="10" name="Рисунок 9"/>
+          <p:cNvPr id="11" name="Рисунок 10"/>
           <p:cNvPicPr>
             <a:picLocks noChangeAspect="1"/>
           </p:cNvPicPr>
@@ -5756,14 +5696,74 @@
         </p:blipFill>
         <p:spPr>
           <a:xfrm>
-            <a:off x="1009138" y="3024701"/>
-            <a:ext cx="2581635" cy="1743318"/>
+            <a:off x="7635344" y="1583988"/>
+            <a:ext cx="3057952" cy="1600423"/>
           </a:xfrm>
           <a:prstGeom prst="rect">
             <a:avLst/>
           </a:prstGeom>
         </p:spPr>
       </p:pic>
+      <p:sp>
+        <p:nvSpPr>
+          <p:cNvPr id="12" name="TextBox 11"/>
+          <p:cNvSpPr txBox="1"/>
+          <p:nvPr/>
+        </p:nvSpPr>
+        <p:spPr>
+          <a:xfrm>
+            <a:off x="1442720" y="948365"/>
+            <a:ext cx="2032000" cy="369332"/>
+          </a:xfrm>
+          <a:prstGeom prst="rect">
+            <a:avLst/>
+          </a:prstGeom>
+          <a:noFill/>
+        </p:spPr>
+        <p:txBody>
+          <a:bodyPr wrap="square" rtlCol="0">
+            <a:spAutoFit/>
+          </a:bodyPr>
+          <a:lstStyle/>
+          <a:p>
+            <a:r>
+              <a:rPr lang="ru-RU" dirty="0" smtClean="0"/>
+              <a:t>До</a:t>
+            </a:r>
+            <a:endParaRPr lang="ru-RU" dirty="0"/>
+          </a:p>
+        </p:txBody>
+      </p:sp>
+      <p:sp>
+        <p:nvSpPr>
+          <p:cNvPr id="13" name="TextBox 12"/>
+          <p:cNvSpPr txBox="1"/>
+          <p:nvPr/>
+        </p:nvSpPr>
+        <p:spPr>
+          <a:xfrm>
+            <a:off x="7782560" y="943672"/>
+            <a:ext cx="2032000" cy="369332"/>
+          </a:xfrm>
+          <a:prstGeom prst="rect">
+            <a:avLst/>
+          </a:prstGeom>
+          <a:noFill/>
+        </p:spPr>
+        <p:txBody>
+          <a:bodyPr wrap="square" rtlCol="0">
+            <a:spAutoFit/>
+          </a:bodyPr>
+          <a:lstStyle/>
+          <a:p>
+            <a:r>
+              <a:rPr lang="ru-RU" dirty="0" smtClean="0"/>
+              <a:t>После</a:t>
+            </a:r>
+            <a:endParaRPr lang="ru-RU" dirty="0"/>
+          </a:p>
+        </p:txBody>
+      </p:sp>
     </p:spTree>
     <p:extLst>
       <p:ext uri="{BB962C8B-B14F-4D97-AF65-F5344CB8AC3E}">
@@ -5774,6 +5774,13 @@
   <p:clrMapOvr>
     <a:masterClrMapping/>
   </p:clrMapOvr>
+  <p:timing>
+    <p:tnLst>
+      <p:par>
+        <p:cTn id="1" dur="indefinite" restart="never" nodeType="tmRoot"/>
+      </p:par>
+    </p:tnLst>
+  </p:timing>
 </p:sld>
 </file>
 
@@ -5828,90 +5835,6 @@
           </a:p>
         </p:txBody>
       </p:sp>
-      <p:sp>
-        <p:nvSpPr>
-          <p:cNvPr id="7" name="TextBox 6"/>
-          <p:cNvSpPr txBox="1"/>
-          <p:nvPr/>
-        </p:nvSpPr>
-        <p:spPr>
-          <a:xfrm>
-            <a:off x="7200900" y="1116624"/>
-            <a:ext cx="3727938" cy="2585323"/>
-          </a:xfrm>
-          <a:prstGeom prst="rect">
-            <a:avLst/>
-          </a:prstGeom>
-          <a:noFill/>
-        </p:spPr>
-        <p:txBody>
-          <a:bodyPr wrap="square" rtlCol="0">
-            <a:spAutoFit/>
-          </a:bodyPr>
-          <a:lstStyle/>
-          <a:p>
-            <a:r>
-              <a:rPr lang="ru-RU" dirty="0" smtClean="0"/>
-              <a:t>Результат: открывается всплывающее окно с полем для ввода категории, к которой будет принадлежать вещь, после введения и нажатия </a:t>
-            </a:r>
-            <a:r>
-              <a:rPr lang="en-US" dirty="0" smtClean="0"/>
-              <a:t>Ok</a:t>
-            </a:r>
-            <a:r>
-              <a:rPr lang="ru-RU" dirty="0" smtClean="0"/>
-              <a:t> появится новое окно с полем для введения названия вещи. После нажатия </a:t>
-            </a:r>
-            <a:r>
-              <a:rPr lang="en-US" dirty="0" smtClean="0"/>
-              <a:t>Ok </a:t>
-            </a:r>
-            <a:r>
-              <a:rPr lang="ru-RU" dirty="0" smtClean="0"/>
-              <a:t>вещь добавляется, при нажатии </a:t>
-            </a:r>
-            <a:r>
-              <a:rPr lang="en-US" dirty="0" smtClean="0"/>
-              <a:t>Cancel </a:t>
-            </a:r>
-            <a:r>
-              <a:rPr lang="ru-RU" dirty="0" smtClean="0"/>
-              <a:t>окно закрывается без изменений.</a:t>
-            </a:r>
-            <a:endParaRPr lang="ru-RU" dirty="0"/>
-          </a:p>
-        </p:txBody>
-      </p:sp>
-      <p:sp>
-        <p:nvSpPr>
-          <p:cNvPr id="8" name="TextBox 7"/>
-          <p:cNvSpPr txBox="1"/>
-          <p:nvPr/>
-        </p:nvSpPr>
-        <p:spPr>
-          <a:xfrm>
-            <a:off x="7200900" y="3968263"/>
-            <a:ext cx="3727938" cy="646331"/>
-          </a:xfrm>
-          <a:prstGeom prst="rect">
-            <a:avLst/>
-          </a:prstGeom>
-          <a:noFill/>
-        </p:spPr>
-        <p:txBody>
-          <a:bodyPr wrap="square" rtlCol="0">
-            <a:spAutoFit/>
-          </a:bodyPr>
-          <a:lstStyle/>
-          <a:p>
-            <a:r>
-              <a:rPr lang="ru-RU" dirty="0" smtClean="0"/>
-              <a:t>При попытке ввода несуществующей категории появится ошибка.</a:t>
-            </a:r>
-            <a:endParaRPr lang="ru-RU" dirty="0"/>
-          </a:p>
-        </p:txBody>
-      </p:sp>
       <p:pic>
         <p:nvPicPr>
           <p:cNvPr id="3" name="Рисунок 2"/>
@@ -5952,7 +5875,7 @@
         </p:blipFill>
         <p:spPr>
           <a:xfrm>
-            <a:off x="3991559" y="936803"/>
+            <a:off x="4167405" y="827250"/>
             <a:ext cx="2133898" cy="1333686"/>
           </a:xfrm>
           <a:prstGeom prst="rect">
@@ -5962,7 +5885,7 @@
       </p:pic>
       <p:pic>
         <p:nvPicPr>
-          <p:cNvPr id="9" name="Рисунок 8"/>
+          <p:cNvPr id="12" name="Рисунок 11"/>
           <p:cNvPicPr>
             <a:picLocks noChangeAspect="1"/>
           </p:cNvPicPr>
@@ -5976,62 +5899,8 @@
         </p:blipFill>
         <p:spPr>
           <a:xfrm>
-            <a:off x="1765978" y="4607169"/>
-            <a:ext cx="3063488" cy="1400666"/>
-          </a:xfrm>
-          <a:prstGeom prst="rect">
-            <a:avLst/>
-          </a:prstGeom>
-        </p:spPr>
-      </p:pic>
-      <p:sp>
-        <p:nvSpPr>
-          <p:cNvPr id="10" name="TextBox 9"/>
-          <p:cNvSpPr txBox="1"/>
-          <p:nvPr/>
-        </p:nvSpPr>
-        <p:spPr>
-          <a:xfrm>
-            <a:off x="7200900" y="5157909"/>
-            <a:ext cx="3727938" cy="923330"/>
-          </a:xfrm>
-          <a:prstGeom prst="rect">
-            <a:avLst/>
-          </a:prstGeom>
-          <a:noFill/>
-        </p:spPr>
-        <p:txBody>
-          <a:bodyPr wrap="square" rtlCol="0">
-            <a:spAutoFit/>
-          </a:bodyPr>
-          <a:lstStyle/>
-          <a:p>
-            <a:r>
-              <a:rPr lang="ru-RU" dirty="0" smtClean="0"/>
-              <a:t>При попытке добавить название уже существующей вещи в категории появится ошибка.</a:t>
-            </a:r>
-            <a:endParaRPr lang="ru-RU" dirty="0"/>
-          </a:p>
-        </p:txBody>
-      </p:sp>
-      <p:pic>
-        <p:nvPicPr>
-          <p:cNvPr id="11" name="Рисунок 10"/>
-          <p:cNvPicPr>
-            <a:picLocks noChangeAspect="1"/>
-          </p:cNvPicPr>
-          <p:nvPr/>
-        </p:nvPicPr>
-        <p:blipFill>
-          <a:blip r:embed="rId5"/>
-          <a:stretch>
-            <a:fillRect/>
-          </a:stretch>
-        </p:blipFill>
-        <p:spPr>
-          <a:xfrm>
-            <a:off x="2049773" y="2688491"/>
-            <a:ext cx="2495898" cy="1733792"/>
+            <a:off x="961507" y="2644156"/>
+            <a:ext cx="5664844" cy="3406720"/>
           </a:xfrm>
           <a:prstGeom prst="rect">
             <a:avLst/>
@@ -6048,6 +5917,13 @@
   <p:clrMapOvr>
     <a:masterClrMapping/>
   </p:clrMapOvr>
+  <p:timing>
+    <p:tnLst>
+      <p:par>
+        <p:cTn id="1" dur="indefinite" restart="never" nodeType="tmRoot"/>
+      </p:par>
+    </p:tnLst>
+  </p:timing>
 </p:sld>
 </file>
 
@@ -6102,123 +5978,9 @@
           </a:p>
         </p:txBody>
       </p:sp>
-      <p:sp>
-        <p:nvSpPr>
-          <p:cNvPr id="7" name="TextBox 6"/>
-          <p:cNvSpPr txBox="1"/>
-          <p:nvPr/>
-        </p:nvSpPr>
-        <p:spPr>
-          <a:xfrm>
-            <a:off x="7200900" y="1116624"/>
-            <a:ext cx="3727938" cy="2862322"/>
-          </a:xfrm>
-          <a:prstGeom prst="rect">
-            <a:avLst/>
-          </a:prstGeom>
-          <a:noFill/>
-        </p:spPr>
-        <p:txBody>
-          <a:bodyPr wrap="square" rtlCol="0">
-            <a:spAutoFit/>
-          </a:bodyPr>
-          <a:lstStyle/>
-          <a:p>
-            <a:r>
-              <a:rPr lang="ru-RU" dirty="0" smtClean="0"/>
-              <a:t>Результат: открывается всплывающее окно с полем для ввода категории, к которой принадлежит вещь, после введения и нажатия </a:t>
-            </a:r>
-            <a:r>
-              <a:rPr lang="en-US" dirty="0" smtClean="0"/>
-              <a:t>Ok</a:t>
-            </a:r>
-            <a:r>
-              <a:rPr lang="ru-RU" dirty="0" smtClean="0"/>
-              <a:t> появится новое окно с полем для введения названия вещи для удаления. После нажатия </a:t>
-            </a:r>
-            <a:r>
-              <a:rPr lang="en-US" dirty="0" smtClean="0"/>
-              <a:t>Ok </a:t>
-            </a:r>
-            <a:r>
-              <a:rPr lang="ru-RU" dirty="0" smtClean="0"/>
-              <a:t>вещь добавляется, при нажатии </a:t>
-            </a:r>
-            <a:r>
-              <a:rPr lang="en-US" dirty="0" smtClean="0"/>
-              <a:t>Cancel </a:t>
-            </a:r>
-            <a:r>
-              <a:rPr lang="ru-RU" dirty="0" smtClean="0"/>
-              <a:t>окно закрывается без изменений.</a:t>
-            </a:r>
-            <a:endParaRPr lang="ru-RU" dirty="0"/>
-          </a:p>
-        </p:txBody>
-      </p:sp>
-      <p:sp>
-        <p:nvSpPr>
-          <p:cNvPr id="8" name="TextBox 7"/>
-          <p:cNvSpPr txBox="1"/>
-          <p:nvPr/>
-        </p:nvSpPr>
-        <p:spPr>
-          <a:xfrm>
-            <a:off x="7200900" y="3968263"/>
-            <a:ext cx="3727938" cy="646331"/>
-          </a:xfrm>
-          <a:prstGeom prst="rect">
-            <a:avLst/>
-          </a:prstGeom>
-          <a:noFill/>
-        </p:spPr>
-        <p:txBody>
-          <a:bodyPr wrap="square" rtlCol="0">
-            <a:spAutoFit/>
-          </a:bodyPr>
-          <a:lstStyle/>
-          <a:p>
-            <a:r>
-              <a:rPr lang="ru-RU" dirty="0" smtClean="0"/>
-              <a:t>При попытке ввода несуществующей категории появится ошибка.</a:t>
-            </a:r>
-            <a:endParaRPr lang="ru-RU" dirty="0"/>
-          </a:p>
-        </p:txBody>
-      </p:sp>
-      <p:sp>
-        <p:nvSpPr>
-          <p:cNvPr id="10" name="TextBox 9"/>
-          <p:cNvSpPr txBox="1"/>
-          <p:nvPr/>
-        </p:nvSpPr>
-        <p:spPr>
-          <a:xfrm>
-            <a:off x="7200900" y="5157909"/>
-            <a:ext cx="3727938" cy="923330"/>
-          </a:xfrm>
-          <a:prstGeom prst="rect">
-            <a:avLst/>
-          </a:prstGeom>
-          <a:noFill/>
-        </p:spPr>
-        <p:txBody>
-          <a:bodyPr wrap="square" rtlCol="0">
-            <a:spAutoFit/>
-          </a:bodyPr>
-          <a:lstStyle/>
-          <a:p>
-            <a:r>
-              <a:rPr lang="ru-RU" dirty="0" smtClean="0"/>
-              <a:t>При попытке удалить несуществующую вещь в категории появится ошибка.</a:t>
-            </a:r>
-            <a:endParaRPr lang="ru-RU" dirty="0"/>
-          </a:p>
-        </p:txBody>
-      </p:sp>
       <p:pic>
         <p:nvPicPr>
-          <p:cNvPr id="11" name="Рисунок 10"/>
+          <p:cNvPr id="2" name="Рисунок 1"/>
           <p:cNvPicPr>
             <a:picLocks noChangeAspect="1"/>
           </p:cNvPicPr>
@@ -6232,8 +5994,8 @@
         </p:blipFill>
         <p:spPr>
           <a:xfrm>
-            <a:off x="2049773" y="2688491"/>
-            <a:ext cx="2495898" cy="1733792"/>
+            <a:off x="1128857" y="898697"/>
+            <a:ext cx="2476846" cy="1409897"/>
           </a:xfrm>
           <a:prstGeom prst="rect">
             <a:avLst/>
@@ -6242,7 +6004,7 @@
       </p:pic>
       <p:pic>
         <p:nvPicPr>
-          <p:cNvPr id="2" name="Рисунок 1"/>
+          <p:cNvPr id="4" name="Рисунок 3"/>
           <p:cNvPicPr>
             <a:picLocks noChangeAspect="1"/>
           </p:cNvPicPr>
@@ -6256,8 +6018,8 @@
         </p:blipFill>
         <p:spPr>
           <a:xfrm>
-            <a:off x="1128857" y="898697"/>
-            <a:ext cx="2476846" cy="1409897"/>
+            <a:off x="3895545" y="898697"/>
+            <a:ext cx="2572109" cy="1609950"/>
           </a:xfrm>
           <a:prstGeom prst="rect">
             <a:avLst/>
@@ -6266,7 +6028,7 @@
       </p:pic>
       <p:pic>
         <p:nvPicPr>
-          <p:cNvPr id="4" name="Рисунок 3"/>
+          <p:cNvPr id="13" name="Рисунок 12"/>
           <p:cNvPicPr>
             <a:picLocks noChangeAspect="1"/>
           </p:cNvPicPr>
@@ -6280,32 +6042,8 @@
         </p:blipFill>
         <p:spPr>
           <a:xfrm>
-            <a:off x="3895545" y="898697"/>
-            <a:ext cx="2572109" cy="1609950"/>
-          </a:xfrm>
-          <a:prstGeom prst="rect">
-            <a:avLst/>
-          </a:prstGeom>
-        </p:spPr>
-      </p:pic>
-      <p:pic>
-        <p:nvPicPr>
-          <p:cNvPr id="12" name="Рисунок 11"/>
-          <p:cNvPicPr>
-            <a:picLocks noChangeAspect="1"/>
-          </p:cNvPicPr>
-          <p:nvPr/>
-        </p:nvPicPr>
-        <p:blipFill>
-          <a:blip r:embed="rId5"/>
-          <a:stretch>
-            <a:fillRect/>
-          </a:stretch>
-        </p:blipFill>
-        <p:spPr>
-          <a:xfrm>
-            <a:off x="2183141" y="4478284"/>
-            <a:ext cx="2229161" cy="1819529"/>
+            <a:off x="1128857" y="2534602"/>
+            <a:ext cx="5004443" cy="3250410"/>
           </a:xfrm>
           <a:prstGeom prst="rect">
             <a:avLst/>
@@ -6322,6 +6060,13 @@
   <p:clrMapOvr>
     <a:masterClrMapping/>
   </p:clrMapOvr>
+  <p:timing>
+    <p:tnLst>
+      <p:par>
+        <p:cTn id="1" dur="indefinite" restart="never" nodeType="tmRoot"/>
+      </p:par>
+    </p:tnLst>
+  </p:timing>
 </p:sld>
 </file>
 
@@ -6376,36 +6121,6 @@
           </a:p>
         </p:txBody>
       </p:sp>
-      <p:sp>
-        <p:nvSpPr>
-          <p:cNvPr id="7" name="TextBox 6"/>
-          <p:cNvSpPr txBox="1"/>
-          <p:nvPr/>
-        </p:nvSpPr>
-        <p:spPr>
-          <a:xfrm>
-            <a:off x="7200900" y="1116624"/>
-            <a:ext cx="3727938" cy="2031325"/>
-          </a:xfrm>
-          <a:prstGeom prst="rect">
-            <a:avLst/>
-          </a:prstGeom>
-          <a:noFill/>
-        </p:spPr>
-        <p:txBody>
-          <a:bodyPr wrap="square" rtlCol="0">
-            <a:spAutoFit/>
-          </a:bodyPr>
-          <a:lstStyle/>
-          <a:p>
-            <a:r>
-              <a:rPr lang="ru-RU" dirty="0" smtClean="0"/>
-              <a:t>Результат: открывается всплывающее окно с подтверждением сохранения шаблона в пользовательский, в выборе шаблона пользовательский шаблон становится тем, который был сохранен(изначально он пустой).</a:t>
-            </a:r>
-            <a:endParaRPr lang="ru-RU" dirty="0"/>
-          </a:p>
-        </p:txBody>
-      </p:sp>
       <p:pic>
         <p:nvPicPr>
           <p:cNvPr id="3" name="Рисунок 2"/>
@@ -6422,7 +6137,7 @@
         </p:blipFill>
         <p:spPr>
           <a:xfrm>
-            <a:off x="7200900" y="3987728"/>
+            <a:off x="7508631" y="1116624"/>
             <a:ext cx="3429479" cy="1800476"/>
           </a:xfrm>
           <a:prstGeom prst="rect">
@@ -6464,6 +6179,13 @@
   <p:clrMapOvr>
     <a:masterClrMapping/>
   </p:clrMapOvr>
+  <p:timing>
+    <p:tnLst>
+      <p:par>
+        <p:cTn id="1" dur="indefinite" restart="never" nodeType="tmRoot"/>
+      </p:par>
+    </p:tnLst>
+  </p:timing>
 </p:sld>
 </file>
 
@@ -6518,48 +6240,6 @@
           </a:p>
         </p:txBody>
       </p:sp>
-      <p:sp>
-        <p:nvSpPr>
-          <p:cNvPr id="7" name="TextBox 6"/>
-          <p:cNvSpPr txBox="1"/>
-          <p:nvPr/>
-        </p:nvSpPr>
-        <p:spPr>
-          <a:xfrm>
-            <a:off x="7200900" y="1116624"/>
-            <a:ext cx="3727938" cy="1200329"/>
-          </a:xfrm>
-          <a:prstGeom prst="rect">
-            <a:avLst/>
-          </a:prstGeom>
-          <a:noFill/>
-        </p:spPr>
-        <p:txBody>
-          <a:bodyPr wrap="square" rtlCol="0">
-            <a:spAutoFit/>
-          </a:bodyPr>
-          <a:lstStyle/>
-          <a:p>
-            <a:r>
-              <a:rPr lang="ru-RU" dirty="0" smtClean="0"/>
-              <a:t>Результат: список сохраняется в </a:t>
-            </a:r>
-            <a:r>
-              <a:rPr lang="en-US" dirty="0" err="1" smtClean="0"/>
-              <a:t>saved_checklist.json</a:t>
-            </a:r>
-            <a:r>
-              <a:rPr lang="en-US" dirty="0" smtClean="0"/>
-              <a:t> </a:t>
-            </a:r>
-            <a:r>
-              <a:rPr lang="ru-RU" dirty="0" smtClean="0"/>
-              <a:t>и появляется всплывающее окно оповещающее об этом.</a:t>
-            </a:r>
-            <a:endParaRPr lang="ru-RU" dirty="0"/>
-          </a:p>
-        </p:txBody>
-      </p:sp>
       <p:pic>
         <p:nvPicPr>
           <p:cNvPr id="2" name="Рисунок 1"/>
@@ -6594,6 +6274,13 @@
   <p:clrMapOvr>
     <a:masterClrMapping/>
   </p:clrMapOvr>
+  <p:timing>
+    <p:tnLst>
+      <p:par>
+        <p:cTn id="1" dur="indefinite" restart="never" nodeType="tmRoot"/>
+      </p:par>
+    </p:tnLst>
+  </p:timing>
 </p:sld>
 </file>
 
@@ -6648,36 +6335,6 @@
           </a:p>
         </p:txBody>
       </p:sp>
-      <p:sp>
-        <p:nvSpPr>
-          <p:cNvPr id="7" name="TextBox 6"/>
-          <p:cNvSpPr txBox="1"/>
-          <p:nvPr/>
-        </p:nvSpPr>
-        <p:spPr>
-          <a:xfrm>
-            <a:off x="7200900" y="1116624"/>
-            <a:ext cx="3727938" cy="2308324"/>
-          </a:xfrm>
-          <a:prstGeom prst="rect">
-            <a:avLst/>
-          </a:prstGeom>
-          <a:noFill/>
-        </p:spPr>
-        <p:txBody>
-          <a:bodyPr wrap="square" rtlCol="0">
-            <a:spAutoFit/>
-          </a:bodyPr>
-          <a:lstStyle/>
-          <a:p>
-            <a:r>
-              <a:rPr lang="ru-RU" dirty="0" smtClean="0"/>
-              <a:t>Результат: по нажатию на каждое поле появляется или снимается галочка(в зависимости от того стояла она там или нет). При нажатии на кнопку отметить все выделяются галочки на всех вещах, при нажатии кнопки снять отметки галочки удаляются со всех вещей.</a:t>
-            </a:r>
-            <a:endParaRPr lang="ru-RU" dirty="0"/>
-          </a:p>
-        </p:txBody>
-      </p:sp>
       <p:pic>
         <p:nvPicPr>
           <p:cNvPr id="5" name="Рисунок 4"/>
@@ -6760,6 +6417,13 @@
   <p:clrMapOvr>
     <a:masterClrMapping/>
   </p:clrMapOvr>
+  <p:timing>
+    <p:tnLst>
+      <p:par>
+        <p:cTn id="1" dur="indefinite" restart="never" nodeType="tmRoot"/>
+      </p:par>
+    </p:tnLst>
+  </p:timing>
 </p:sld>
 </file>
 
@@ -6782,59 +6446,14 @@
       </p:grpSpPr>
       <p:sp>
         <p:nvSpPr>
-          <p:cNvPr id="5" name="Скругленный прямоугольник 4"/>
-          <p:cNvSpPr/>
-          <p:nvPr/>
-        </p:nvSpPr>
-        <p:spPr>
-          <a:xfrm>
-            <a:off x="508000" y="827725"/>
-            <a:ext cx="11145520" cy="5725475"/>
-          </a:xfrm>
-          <a:prstGeom prst="roundRect">
-            <a:avLst/>
-          </a:prstGeom>
-          <a:solidFill>
-            <a:schemeClr val="bg1">
-              <a:alpha val="50196"/>
-            </a:schemeClr>
-          </a:solidFill>
-          <a:ln w="3175" cap="flat">
-            <a:noFill/>
-            <a:prstDash val="solid"/>
-            <a:miter/>
-          </a:ln>
-        </p:spPr>
-        <p:txBody>
-          <a:bodyPr rtlCol="0" anchor="ctr" anchorCtr="0"/>
-          <a:lstStyle/>
-          <a:p>
-            <a:pPr algn="ctr"/>
-            <a:endParaRPr lang="ru-RU" sz="2000" dirty="0">
-              <a:solidFill>
-                <a:schemeClr val="bg1"/>
-              </a:solidFill>
-              <a:latin typeface="+mj-lt"/>
-            </a:endParaRPr>
-          </a:p>
-        </p:txBody>
-      </p:sp>
-      <p:sp>
-        <p:nvSpPr>
-          <p:cNvPr id="14" name="TextBox 13">
-            <a:extLst>
-              <a:ext uri="{FF2B5EF4-FFF2-40B4-BE49-F238E27FC236}">
-                <a16:creationId xmlns:a16="http://schemas.microsoft.com/office/drawing/2014/main" id="{2DC454C0-869F-456D-A853-327405F2BB8A}"/>
-              </a:ext>
-            </a:extLst>
-          </p:cNvPr>
+          <p:cNvPr id="6" name="TextBox 5"/>
           <p:cNvSpPr txBox="1"/>
           <p:nvPr/>
         </p:nvSpPr>
         <p:spPr>
           <a:xfrm>
-            <a:off x="3677136" y="1285312"/>
-            <a:ext cx="4837729" cy="646331"/>
+            <a:off x="712177" y="149469"/>
+            <a:ext cx="9319846" cy="523220"/>
           </a:xfrm>
           <a:prstGeom prst="rect">
             <a:avLst/>
@@ -6847,37 +6466,28 @@
           </a:bodyPr>
           <a:lstStyle/>
           <a:p>
-            <a:pPr algn="ctr"/>
-            <a:r>
-              <a:rPr lang="ru-RU" altLang="ko-KR" sz="3600" dirty="0" smtClean="0">
+            <a:r>
+              <a:rPr lang="ru-RU" sz="2800" b="1" dirty="0" smtClean="0">
                 <a:latin typeface="+mj-lt"/>
-                <a:cs typeface="Arial" panose="020B0604020202020204" pitchFamily="34" charset="0"/>
               </a:rPr>
-              <a:t>Заключение</a:t>
-            </a:r>
-            <a:endParaRPr lang="ko-KR" altLang="en-US" sz="3600" dirty="0">
+              <a:t>Обработка ошибок</a:t>
+            </a:r>
+            <a:endParaRPr lang="ru-RU" sz="2800" b="1" dirty="0">
               <a:latin typeface="+mj-lt"/>
-              <a:cs typeface="Arial" panose="020B0604020202020204" pitchFamily="34" charset="0"/>
             </a:endParaRPr>
           </a:p>
         </p:txBody>
       </p:sp>
       <p:sp>
         <p:nvSpPr>
-          <p:cNvPr id="13" name="TextBox 12">
-            <a:extLst>
-              <a:ext uri="{FF2B5EF4-FFF2-40B4-BE49-F238E27FC236}">
-                <a16:creationId xmlns:a16="http://schemas.microsoft.com/office/drawing/2014/main" id="{E2A788A2-9C16-4D17-B7A2-BDACEDE5D3C1}"/>
-              </a:ext>
-            </a:extLst>
-          </p:cNvPr>
+          <p:cNvPr id="7" name="TextBox 6"/>
           <p:cNvSpPr txBox="1"/>
           <p:nvPr/>
         </p:nvSpPr>
         <p:spPr>
           <a:xfrm>
-            <a:off x="1573790" y="2013026"/>
-            <a:ext cx="8890160" cy="4093428"/>
+            <a:off x="7200900" y="1116624"/>
+            <a:ext cx="3727938" cy="646331"/>
           </a:xfrm>
           <a:prstGeom prst="rect">
             <a:avLst/>
@@ -6888,117 +6498,116 @@
           <a:bodyPr wrap="square" rtlCol="0">
             <a:spAutoFit/>
           </a:bodyPr>
-          <a:lstStyle>
-            <a:defPPr>
-              <a:defRPr lang="ko-KR"/>
-            </a:defPPr>
-            <a:lvl1pPr algn="just">
-              <a:lnSpc>
-                <a:spcPct val="150000"/>
-              </a:lnSpc>
-              <a:defRPr sz="1100">
-                <a:solidFill>
-                  <a:schemeClr val="tx1">
-                    <a:lumMod val="75000"/>
-                    <a:lumOff val="25000"/>
-                  </a:schemeClr>
-                </a:solidFill>
-              </a:defRPr>
-            </a:lvl1pPr>
-          </a:lstStyle>
-          <a:p>
-            <a:pPr algn="ctr">
-              <a:lnSpc>
-                <a:spcPct val="100000"/>
-              </a:lnSpc>
-            </a:pPr>
-            <a:r>
-              <a:rPr lang="ru-RU" sz="2000" dirty="0"/>
-              <a:t>В ходе выполнения проекта </a:t>
-            </a:r>
-            <a:r>
-              <a:rPr lang="ru-RU" sz="2000" dirty="0" smtClean="0"/>
-              <a:t>было разработано </a:t>
-            </a:r>
-            <a:r>
-              <a:rPr lang="ru-RU" sz="2000" dirty="0" err="1"/>
-              <a:t>desktop</a:t>
-            </a:r>
-            <a:r>
-              <a:rPr lang="ru-RU" sz="2000" dirty="0"/>
-              <a:t>-приложение «</a:t>
-            </a:r>
-            <a:r>
-              <a:rPr lang="ru-RU" sz="2000" dirty="0" err="1"/>
-              <a:t>TravelPack</a:t>
-            </a:r>
-            <a:r>
-              <a:rPr lang="ru-RU" sz="2000" dirty="0"/>
-              <a:t> — Чек-лист для путешествий», предназначенное для организации и хранения списков вещей перед </a:t>
-            </a:r>
-            <a:r>
-              <a:rPr lang="ru-RU" sz="2000" dirty="0" smtClean="0"/>
-              <a:t>поездками</a:t>
-            </a:r>
-            <a:r>
-              <a:rPr lang="ru-RU" sz="2000" dirty="0"/>
-              <a:t>.</a:t>
-            </a:r>
-          </a:p>
-          <a:p>
-            <a:pPr algn="ctr">
-              <a:lnSpc>
-                <a:spcPct val="100000"/>
-              </a:lnSpc>
-            </a:pPr>
-            <a:r>
-              <a:rPr lang="ru-RU" sz="2000" dirty="0"/>
-              <a:t>В приложении реализованы основные функции для удобного управления чек-листами: использование готовых шаблонов, добавление и удаление категорий и вещей, отметка собранных предметов, сохранение пользовательских данных и экспорт списка в файл</a:t>
-            </a:r>
-            <a:r>
-              <a:rPr lang="ru-RU" sz="2000" dirty="0" smtClean="0"/>
-              <a:t>.</a:t>
-            </a:r>
-            <a:endParaRPr lang="ru-RU" sz="2000" dirty="0"/>
-          </a:p>
-          <a:p>
-            <a:pPr algn="ctr">
-              <a:lnSpc>
-                <a:spcPct val="100000"/>
-              </a:lnSpc>
-            </a:pPr>
-            <a:r>
-              <a:rPr lang="ru-RU" sz="2000" dirty="0"/>
-              <a:t>Разработанный интерфейс обеспечивает удобную работу пользователя с приложением, а использование формата JSON позволяет хранить данные в структурированном виде</a:t>
-            </a:r>
-            <a:r>
-              <a:rPr lang="ru-RU" sz="2000" dirty="0" smtClean="0"/>
-              <a:t>.</a:t>
-            </a:r>
-            <a:endParaRPr lang="ru-RU" sz="2000" dirty="0"/>
-          </a:p>
-          <a:p>
-            <a:pPr algn="ctr">
-              <a:lnSpc>
-                <a:spcPct val="100000"/>
-              </a:lnSpc>
-            </a:pPr>
-            <a:r>
-              <a:rPr lang="ru-RU" sz="2000" dirty="0"/>
-              <a:t>Созданное приложение упрощает подготовку к путешествиям, помогает систематизировать необходимые вещи и уменьшает вероятность забыть важные предметы перед поездкой.</a:t>
-            </a:r>
-            <a:endParaRPr lang="ko-KR" altLang="en-US" sz="1200" dirty="0">
-              <a:solidFill>
-                <a:schemeClr val="tx1"/>
-              </a:solidFill>
-            </a:endParaRPr>
+          <a:lstStyle/>
+          <a:p>
+            <a:r>
+              <a:rPr lang="ru-RU" dirty="0" smtClean="0"/>
+              <a:t>В процессе работы были обработаны ошибки для каждой кнопки.</a:t>
+            </a:r>
+            <a:endParaRPr lang="ru-RU" dirty="0"/>
           </a:p>
         </p:txBody>
       </p:sp>
+      <p:pic>
+        <p:nvPicPr>
+          <p:cNvPr id="4" name="Рисунок 3"/>
+          <p:cNvPicPr>
+            <a:picLocks noChangeAspect="1"/>
+          </p:cNvPicPr>
+          <p:nvPr/>
+        </p:nvPicPr>
+        <p:blipFill>
+          <a:blip r:embed="rId2"/>
+          <a:stretch>
+            <a:fillRect/>
+          </a:stretch>
+        </p:blipFill>
+        <p:spPr>
+          <a:xfrm>
+            <a:off x="778627" y="913031"/>
+            <a:ext cx="3134162" cy="1762371"/>
+          </a:xfrm>
+          <a:prstGeom prst="rect">
+            <a:avLst/>
+          </a:prstGeom>
+        </p:spPr>
+      </p:pic>
+      <p:pic>
+        <p:nvPicPr>
+          <p:cNvPr id="9" name="Рисунок 8"/>
+          <p:cNvPicPr>
+            <a:picLocks noChangeAspect="1"/>
+          </p:cNvPicPr>
+          <p:nvPr/>
+        </p:nvPicPr>
+        <p:blipFill>
+          <a:blip r:embed="rId3"/>
+          <a:stretch>
+            <a:fillRect/>
+          </a:stretch>
+        </p:blipFill>
+        <p:spPr>
+          <a:xfrm>
+            <a:off x="3721404" y="4315856"/>
+            <a:ext cx="2581635" cy="1743318"/>
+          </a:xfrm>
+          <a:prstGeom prst="rect">
+            <a:avLst/>
+          </a:prstGeom>
+        </p:spPr>
+      </p:pic>
+      <p:pic>
+        <p:nvPicPr>
+          <p:cNvPr id="10" name="Рисунок 9"/>
+          <p:cNvPicPr>
+            <a:picLocks noChangeAspect="1"/>
+          </p:cNvPicPr>
+          <p:nvPr/>
+        </p:nvPicPr>
+        <p:blipFill>
+          <a:blip r:embed="rId4"/>
+          <a:stretch>
+            <a:fillRect/>
+          </a:stretch>
+        </p:blipFill>
+        <p:spPr>
+          <a:xfrm>
+            <a:off x="980896" y="4241624"/>
+            <a:ext cx="2229161" cy="1819529"/>
+          </a:xfrm>
+          <a:prstGeom prst="rect">
+            <a:avLst/>
+          </a:prstGeom>
+        </p:spPr>
+      </p:pic>
+      <p:pic>
+        <p:nvPicPr>
+          <p:cNvPr id="11" name="Рисунок 10"/>
+          <p:cNvPicPr>
+            <a:picLocks noChangeAspect="1"/>
+          </p:cNvPicPr>
+          <p:nvPr/>
+        </p:nvPicPr>
+        <p:blipFill>
+          <a:blip r:embed="rId5"/>
+          <a:stretch>
+            <a:fillRect/>
+          </a:stretch>
+        </p:blipFill>
+        <p:spPr>
+          <a:xfrm>
+            <a:off x="813964" y="2787542"/>
+            <a:ext cx="3063488" cy="1400666"/>
+          </a:xfrm>
+          <a:prstGeom prst="rect">
+            <a:avLst/>
+          </a:prstGeom>
+        </p:spPr>
+      </p:pic>
     </p:spTree>
     <p:extLst>
       <p:ext uri="{BB962C8B-B14F-4D97-AF65-F5344CB8AC3E}">
-        <p14:creationId xmlns:p14="http://schemas.microsoft.com/office/powerpoint/2010/main" val="1333396812"/>
+        <p14:creationId xmlns:p14="http://schemas.microsoft.com/office/powerpoint/2010/main" val="1133754111"/>
       </p:ext>
     </p:extLst>
   </p:cSld>
@@ -7034,6 +6643,258 @@
       </p:grpSpPr>
       <p:sp>
         <p:nvSpPr>
+          <p:cNvPr id="5" name="Скругленный прямоугольник 4"/>
+          <p:cNvSpPr/>
+          <p:nvPr/>
+        </p:nvSpPr>
+        <p:spPr>
+          <a:xfrm>
+            <a:off x="508000" y="827725"/>
+            <a:ext cx="11145520" cy="5725475"/>
+          </a:xfrm>
+          <a:prstGeom prst="roundRect">
+            <a:avLst/>
+          </a:prstGeom>
+          <a:solidFill>
+            <a:schemeClr val="bg1">
+              <a:alpha val="50196"/>
+            </a:schemeClr>
+          </a:solidFill>
+          <a:ln w="3175" cap="flat">
+            <a:noFill/>
+            <a:prstDash val="solid"/>
+            <a:miter/>
+          </a:ln>
+        </p:spPr>
+        <p:txBody>
+          <a:bodyPr rtlCol="0" anchor="ctr" anchorCtr="0"/>
+          <a:lstStyle/>
+          <a:p>
+            <a:pPr algn="ctr"/>
+            <a:endParaRPr lang="ru-RU" sz="2000" dirty="0">
+              <a:solidFill>
+                <a:schemeClr val="bg1"/>
+              </a:solidFill>
+              <a:latin typeface="+mj-lt"/>
+            </a:endParaRPr>
+          </a:p>
+        </p:txBody>
+      </p:sp>
+      <p:sp>
+        <p:nvSpPr>
+          <p:cNvPr id="14" name="TextBox 13">
+            <a:extLst>
+              <a:ext uri="{FF2B5EF4-FFF2-40B4-BE49-F238E27FC236}">
+                <a16:creationId xmlns:a16="http://schemas.microsoft.com/office/drawing/2014/main" id="{2DC454C0-869F-456D-A853-327405F2BB8A}"/>
+              </a:ext>
+            </a:extLst>
+          </p:cNvPr>
+          <p:cNvSpPr txBox="1"/>
+          <p:nvPr/>
+        </p:nvSpPr>
+        <p:spPr>
+          <a:xfrm>
+            <a:off x="3677136" y="1285312"/>
+            <a:ext cx="4837729" cy="646331"/>
+          </a:xfrm>
+          <a:prstGeom prst="rect">
+            <a:avLst/>
+          </a:prstGeom>
+          <a:noFill/>
+        </p:spPr>
+        <p:txBody>
+          <a:bodyPr wrap="square" rtlCol="0">
+            <a:spAutoFit/>
+          </a:bodyPr>
+          <a:lstStyle/>
+          <a:p>
+            <a:pPr algn="ctr"/>
+            <a:r>
+              <a:rPr lang="ru-RU" altLang="ko-KR" sz="3600" dirty="0" smtClean="0">
+                <a:latin typeface="+mj-lt"/>
+                <a:cs typeface="Arial" panose="020B0604020202020204" pitchFamily="34" charset="0"/>
+              </a:rPr>
+              <a:t>Заключение</a:t>
+            </a:r>
+            <a:endParaRPr lang="ko-KR" altLang="en-US" sz="3600" dirty="0">
+              <a:latin typeface="+mj-lt"/>
+              <a:cs typeface="Arial" panose="020B0604020202020204" pitchFamily="34" charset="0"/>
+            </a:endParaRPr>
+          </a:p>
+        </p:txBody>
+      </p:sp>
+      <p:sp>
+        <p:nvSpPr>
+          <p:cNvPr id="13" name="TextBox 12">
+            <a:extLst>
+              <a:ext uri="{FF2B5EF4-FFF2-40B4-BE49-F238E27FC236}">
+                <a16:creationId xmlns:a16="http://schemas.microsoft.com/office/drawing/2014/main" id="{E2A788A2-9C16-4D17-B7A2-BDACEDE5D3C1}"/>
+              </a:ext>
+            </a:extLst>
+          </p:cNvPr>
+          <p:cNvSpPr txBox="1"/>
+          <p:nvPr/>
+        </p:nvSpPr>
+        <p:spPr>
+          <a:xfrm>
+            <a:off x="1573790" y="2013026"/>
+            <a:ext cx="8890160" cy="4093428"/>
+          </a:xfrm>
+          <a:prstGeom prst="rect">
+            <a:avLst/>
+          </a:prstGeom>
+          <a:noFill/>
+        </p:spPr>
+        <p:txBody>
+          <a:bodyPr wrap="square" rtlCol="0">
+            <a:spAutoFit/>
+          </a:bodyPr>
+          <a:lstStyle>
+            <a:defPPr>
+              <a:defRPr lang="ko-KR"/>
+            </a:defPPr>
+            <a:lvl1pPr algn="just">
+              <a:lnSpc>
+                <a:spcPct val="150000"/>
+              </a:lnSpc>
+              <a:defRPr sz="1100">
+                <a:solidFill>
+                  <a:schemeClr val="tx1">
+                    <a:lumMod val="75000"/>
+                    <a:lumOff val="25000"/>
+                  </a:schemeClr>
+                </a:solidFill>
+              </a:defRPr>
+            </a:lvl1pPr>
+          </a:lstStyle>
+          <a:p>
+            <a:pPr algn="ctr">
+              <a:lnSpc>
+                <a:spcPct val="100000"/>
+              </a:lnSpc>
+            </a:pPr>
+            <a:r>
+              <a:rPr lang="ru-RU" sz="2000" dirty="0"/>
+              <a:t>В ходе выполнения проекта </a:t>
+            </a:r>
+            <a:r>
+              <a:rPr lang="ru-RU" sz="2000" dirty="0" smtClean="0"/>
+              <a:t>было разработано </a:t>
+            </a:r>
+            <a:r>
+              <a:rPr lang="ru-RU" sz="2000" dirty="0" err="1"/>
+              <a:t>desktop</a:t>
+            </a:r>
+            <a:r>
+              <a:rPr lang="ru-RU" sz="2000" dirty="0"/>
+              <a:t>-приложение «</a:t>
+            </a:r>
+            <a:r>
+              <a:rPr lang="ru-RU" sz="2000" dirty="0" err="1"/>
+              <a:t>TravelPack</a:t>
+            </a:r>
+            <a:r>
+              <a:rPr lang="ru-RU" sz="2000" dirty="0"/>
+              <a:t> — Чек-лист для путешествий», предназначенное для организации и хранения списков вещей перед </a:t>
+            </a:r>
+            <a:r>
+              <a:rPr lang="ru-RU" sz="2000" dirty="0" smtClean="0"/>
+              <a:t>поездками</a:t>
+            </a:r>
+            <a:r>
+              <a:rPr lang="ru-RU" sz="2000" dirty="0"/>
+              <a:t>.</a:t>
+            </a:r>
+          </a:p>
+          <a:p>
+            <a:pPr algn="ctr">
+              <a:lnSpc>
+                <a:spcPct val="100000"/>
+              </a:lnSpc>
+            </a:pPr>
+            <a:r>
+              <a:rPr lang="ru-RU" sz="2000" dirty="0"/>
+              <a:t>В приложении реализованы основные функции для удобного управления чек-листами: использование готовых шаблонов, добавление и удаление категорий и вещей, отметка собранных предметов, сохранение пользовательских данных и экспорт списка в файл</a:t>
+            </a:r>
+            <a:r>
+              <a:rPr lang="ru-RU" sz="2000" dirty="0" smtClean="0"/>
+              <a:t>.</a:t>
+            </a:r>
+            <a:endParaRPr lang="ru-RU" sz="2000" dirty="0"/>
+          </a:p>
+          <a:p>
+            <a:pPr algn="ctr">
+              <a:lnSpc>
+                <a:spcPct val="100000"/>
+              </a:lnSpc>
+            </a:pPr>
+            <a:r>
+              <a:rPr lang="ru-RU" sz="2000" dirty="0"/>
+              <a:t>Разработанный интерфейс обеспечивает удобную работу пользователя с приложением, а использование формата JSON позволяет хранить данные в структурированном виде</a:t>
+            </a:r>
+            <a:r>
+              <a:rPr lang="ru-RU" sz="2000" dirty="0" smtClean="0"/>
+              <a:t>.</a:t>
+            </a:r>
+            <a:endParaRPr lang="ru-RU" sz="2000" dirty="0"/>
+          </a:p>
+          <a:p>
+            <a:pPr algn="ctr">
+              <a:lnSpc>
+                <a:spcPct val="100000"/>
+              </a:lnSpc>
+            </a:pPr>
+            <a:r>
+              <a:rPr lang="ru-RU" sz="2000" dirty="0"/>
+              <a:t>Созданное приложение упрощает подготовку к путешествиям, помогает систематизировать необходимые вещи и уменьшает вероятность забыть важные предметы перед поездкой.</a:t>
+            </a:r>
+            <a:endParaRPr lang="ko-KR" altLang="en-US" sz="1200" dirty="0">
+              <a:solidFill>
+                <a:schemeClr val="tx1"/>
+              </a:solidFill>
+            </a:endParaRPr>
+          </a:p>
+        </p:txBody>
+      </p:sp>
+    </p:spTree>
+    <p:extLst>
+      <p:ext uri="{BB962C8B-B14F-4D97-AF65-F5344CB8AC3E}">
+        <p14:creationId xmlns:p14="http://schemas.microsoft.com/office/powerpoint/2010/main" val="1333396812"/>
+      </p:ext>
+    </p:extLst>
+  </p:cSld>
+  <p:clrMapOvr>
+    <a:masterClrMapping/>
+  </p:clrMapOvr>
+  <p:timing>
+    <p:tnLst>
+      <p:par>
+        <p:cTn id="1" dur="indefinite" restart="never" nodeType="tmRoot"/>
+      </p:par>
+    </p:tnLst>
+  </p:timing>
+</p:sld>
+</file>
+
+<file path=ppt/slides/slide19.xml><?xml version="1.0" encoding="utf-8"?>
+<p:sld xmlns:a="http://schemas.openxmlformats.org/drawingml/2006/main" xmlns:r="http://schemas.openxmlformats.org/officeDocument/2006/relationships" xmlns:p="http://schemas.openxmlformats.org/presentationml/2006/main">
+  <p:cSld>
+    <p:spTree>
+      <p:nvGrpSpPr>
+        <p:cNvPr id="1" name=""/>
+        <p:cNvGrpSpPr/>
+        <p:nvPr/>
+      </p:nvGrpSpPr>
+      <p:grpSpPr>
+        <a:xfrm>
+          <a:off x="0" y="0"/>
+          <a:ext cx="0" cy="0"/>
+          <a:chOff x="0" y="0"/>
+          <a:chExt cx="0" cy="0"/>
+        </a:xfrm>
+      </p:grpSpPr>
+      <p:sp>
+        <p:nvSpPr>
           <p:cNvPr id="5" name="TextBox 4">
             <a:extLst>
               <a:ext uri="{FF2B5EF4-FFF2-40B4-BE49-F238E27FC236}">
@@ -7108,6 +6969,13 @@
   <p:clrMapOvr>
     <a:masterClrMapping/>
   </p:clrMapOvr>
+  <p:timing>
+    <p:tnLst>
+      <p:par>
+        <p:cTn id="1" dur="indefinite" restart="never" nodeType="tmRoot"/>
+      </p:par>
+    </p:tnLst>
+  </p:timing>
 </p:sld>
 </file>
 
@@ -7130,13 +6998,13 @@
       </p:grpSpPr>
       <p:sp>
         <p:nvSpPr>
-          <p:cNvPr id="2" name="Скругленный прямоугольник 1"/>
+          <p:cNvPr id="33" name="Скругленный прямоугольник 32"/>
           <p:cNvSpPr/>
           <p:nvPr/>
         </p:nvSpPr>
         <p:spPr>
           <a:xfrm>
-            <a:off x="548640" y="817565"/>
+            <a:off x="538480" y="715965"/>
             <a:ext cx="11145520" cy="5725475"/>
           </a:xfrm>
           <a:prstGeom prst="roundRect">
@@ -7169,20 +7037,14 @@
       </p:sp>
       <p:sp>
         <p:nvSpPr>
-          <p:cNvPr id="14" name="TextBox 13">
-            <a:extLst>
-              <a:ext uri="{FF2B5EF4-FFF2-40B4-BE49-F238E27FC236}">
-                <a16:creationId xmlns:a16="http://schemas.microsoft.com/office/drawing/2014/main" id="{2DC454C0-869F-456D-A853-327405F2BB8A}"/>
-              </a:ext>
-            </a:extLst>
-          </p:cNvPr>
+          <p:cNvPr id="2" name="TextBox 1"/>
           <p:cNvSpPr txBox="1"/>
           <p:nvPr/>
         </p:nvSpPr>
         <p:spPr>
           <a:xfrm>
-            <a:off x="3600005" y="1112592"/>
-            <a:ext cx="4837729" cy="646331"/>
+            <a:off x="889000" y="1268492"/>
+            <a:ext cx="1566600" cy="3293209"/>
           </a:xfrm>
           <a:prstGeom prst="rect">
             <a:avLst/>
@@ -7195,37 +7057,25 @@
           </a:bodyPr>
           <a:lstStyle/>
           <a:p>
-            <a:pPr algn="ctr"/>
-            <a:r>
-              <a:rPr lang="ru-RU" altLang="ko-KR" sz="3600" dirty="0" smtClean="0">
-                <a:latin typeface="+mj-lt"/>
+            <a:r>
+              <a:rPr lang="ru-RU" sz="1600" dirty="0">
                 <a:cs typeface="Arial" panose="020B0604020202020204" pitchFamily="34" charset="0"/>
               </a:rPr>
-              <a:t>Предметная область</a:t>
-            </a:r>
-            <a:endParaRPr lang="ko-KR" altLang="en-US" sz="3600" dirty="0">
-              <a:latin typeface="+mj-lt"/>
-              <a:cs typeface="Arial" panose="020B0604020202020204" pitchFamily="34" charset="0"/>
-            </a:endParaRPr>
+              <a:t>Разработка настольного приложения для составления персонализированных чек-листов путешественника с поддержкой категорий, готовых шаблонов и сохранением списков в файл.</a:t>
+            </a:r>
           </a:p>
         </p:txBody>
       </p:sp>
       <p:sp>
         <p:nvSpPr>
-          <p:cNvPr id="13" name="TextBox 12">
-            <a:extLst>
-              <a:ext uri="{FF2B5EF4-FFF2-40B4-BE49-F238E27FC236}">
-                <a16:creationId xmlns:a16="http://schemas.microsoft.com/office/drawing/2014/main" id="{E2A788A2-9C16-4D17-B7A2-BDACEDE5D3C1}"/>
-              </a:ext>
-            </a:extLst>
-          </p:cNvPr>
+          <p:cNvPr id="3" name="TextBox 2"/>
           <p:cNvSpPr txBox="1"/>
           <p:nvPr/>
         </p:nvSpPr>
         <p:spPr>
           <a:xfrm>
-            <a:off x="642270" y="1686554"/>
-            <a:ext cx="10614959" cy="4708981"/>
+            <a:off x="861060" y="876300"/>
+            <a:ext cx="1452880" cy="461665"/>
           </a:xfrm>
           <a:prstGeom prst="rect">
             <a:avLst/>
@@ -7236,271 +7086,344 @@
           <a:bodyPr wrap="square" rtlCol="0">
             <a:spAutoFit/>
           </a:bodyPr>
-          <a:lstStyle>
-            <a:defPPr>
-              <a:defRPr lang="ko-KR"/>
-            </a:defPPr>
-            <a:lvl1pPr algn="just">
-              <a:lnSpc>
-                <a:spcPct val="150000"/>
-              </a:lnSpc>
-              <a:defRPr sz="1100">
-                <a:solidFill>
-                  <a:schemeClr val="tx1">
-                    <a:lumMod val="75000"/>
-                    <a:lumOff val="25000"/>
-                  </a:schemeClr>
-                </a:solidFill>
-              </a:defRPr>
-            </a:lvl1pPr>
-          </a:lstStyle>
-          <a:p>
-            <a:pPr algn="ctr">
-              <a:lnSpc>
-                <a:spcPct val="100000"/>
-              </a:lnSpc>
-            </a:pPr>
-            <a:r>
-              <a:rPr lang="ru-RU" altLang="ko-KR" sz="2000" dirty="0">
-                <a:solidFill>
-                  <a:schemeClr val="tx1"/>
-                </a:solidFill>
+          <a:lstStyle/>
+          <a:p>
+            <a:r>
+              <a:rPr lang="ru-RU" sz="2400" b="1" dirty="0" smtClean="0">
+                <a:latin typeface="+mj-lt"/>
               </a:rPr>
-              <a:t>Предметной областью проекта является организация подготовки к путешествиям с помощью электронных чек-листов.</a:t>
-            </a:r>
-          </a:p>
-          <a:p>
-            <a:pPr algn="ctr">
-              <a:lnSpc>
-                <a:spcPct val="100000"/>
-              </a:lnSpc>
-            </a:pPr>
-            <a:endParaRPr lang="ru-RU" altLang="ko-KR" sz="2000" dirty="0">
-              <a:solidFill>
-                <a:schemeClr val="tx1"/>
-              </a:solidFill>
-            </a:endParaRPr>
-          </a:p>
-          <a:p>
-            <a:pPr algn="ctr">
-              <a:lnSpc>
-                <a:spcPct val="100000"/>
-              </a:lnSpc>
-            </a:pPr>
-            <a:r>
-              <a:rPr lang="ru-RU" altLang="ko-KR" sz="2000" dirty="0">
-                <a:solidFill>
-                  <a:schemeClr val="tx1"/>
-                </a:solidFill>
+              <a:t>Цель</a:t>
+            </a:r>
+            <a:r>
+              <a:rPr lang="en-US" sz="2400" b="1" dirty="0" smtClean="0">
+                <a:latin typeface="+mj-lt"/>
               </a:rPr>
-              <a:t>Во время подготовки к поездке пользователи часто сталкиваются с проблемой забытых вещей, отсутствием структурированного списка необходимых предметов и неудобством хранения информации. Для решения данной проблемы разрабатывается </a:t>
-            </a:r>
-            <a:r>
-              <a:rPr lang="ru-RU" altLang="ko-KR" sz="2000" dirty="0" err="1">
-                <a:solidFill>
-                  <a:schemeClr val="tx1"/>
-                </a:solidFill>
-              </a:rPr>
-              <a:t>desktop</a:t>
-            </a:r>
-            <a:r>
-              <a:rPr lang="ru-RU" altLang="ko-KR" sz="2000" dirty="0">
-                <a:solidFill>
-                  <a:schemeClr val="tx1"/>
-                </a:solidFill>
-              </a:rPr>
-              <a:t>-приложение «</a:t>
-            </a:r>
-            <a:r>
-              <a:rPr lang="ru-RU" altLang="ko-KR" sz="2000" dirty="0" err="1">
-                <a:solidFill>
-                  <a:schemeClr val="tx1"/>
-                </a:solidFill>
-              </a:rPr>
-              <a:t>TravelPack</a:t>
-            </a:r>
-            <a:r>
-              <a:rPr lang="ru-RU" altLang="ko-KR" sz="2000" dirty="0">
-                <a:solidFill>
-                  <a:schemeClr val="tx1"/>
-                </a:solidFill>
-              </a:rPr>
-              <a:t> — Чек-лист для путешествий».</a:t>
-            </a:r>
-          </a:p>
-          <a:p>
-            <a:pPr algn="ctr">
-              <a:lnSpc>
-                <a:spcPct val="100000"/>
-              </a:lnSpc>
-            </a:pPr>
-            <a:endParaRPr lang="ru-RU" altLang="ko-KR" sz="2000" dirty="0">
-              <a:solidFill>
-                <a:schemeClr val="tx1"/>
-              </a:solidFill>
-            </a:endParaRPr>
-          </a:p>
-          <a:p>
-            <a:pPr algn="ctr">
-              <a:lnSpc>
-                <a:spcPct val="100000"/>
-              </a:lnSpc>
-            </a:pPr>
-            <a:r>
-              <a:rPr lang="ru-RU" altLang="ko-KR" sz="2000" dirty="0">
-                <a:solidFill>
-                  <a:schemeClr val="tx1"/>
-                </a:solidFill>
-              </a:rPr>
-              <a:t>Приложение предназначено для создания, редактирования и хранения списков вещей, необходимых для различных типов поездок. Пользователь может использовать готовые шаблоны путешествий, создавать собственные категории и добавлять нужные предметы.</a:t>
-            </a:r>
-          </a:p>
-          <a:p>
-            <a:pPr algn="ctr">
-              <a:lnSpc>
-                <a:spcPct val="100000"/>
-              </a:lnSpc>
-            </a:pPr>
-            <a:endParaRPr lang="ru-RU" altLang="ko-KR" sz="2000" dirty="0">
-              <a:solidFill>
-                <a:schemeClr val="tx1"/>
-              </a:solidFill>
-            </a:endParaRPr>
-          </a:p>
-          <a:p>
-            <a:pPr algn="ctr">
-              <a:lnSpc>
-                <a:spcPct val="100000"/>
-              </a:lnSpc>
-            </a:pPr>
-            <a:r>
-              <a:rPr lang="ru-RU" altLang="ko-KR" sz="2000" dirty="0">
-                <a:solidFill>
-                  <a:schemeClr val="tx1"/>
-                </a:solidFill>
-              </a:rPr>
-              <a:t>Система помогает упростить процесс сборов, повысить удобство планирования поездок и снизить вероятность забыть важные вещи.</a:t>
-            </a:r>
-            <a:endParaRPr lang="ko-KR" altLang="en-US" sz="2000" dirty="0">
-              <a:solidFill>
-                <a:schemeClr val="tx1"/>
-              </a:solidFill>
+              <a:t>:</a:t>
+            </a:r>
+            <a:endParaRPr lang="ru-RU" sz="2400" b="1" dirty="0">
+              <a:latin typeface="+mj-lt"/>
             </a:endParaRPr>
           </a:p>
         </p:txBody>
       </p:sp>
-      <p:pic>
-        <p:nvPicPr>
-          <p:cNvPr id="47" name="그림 46">
-            <a:extLst>
-              <a:ext uri="{FF2B5EF4-FFF2-40B4-BE49-F238E27FC236}">
-                <a16:creationId xmlns:a16="http://schemas.microsoft.com/office/drawing/2014/main" id="{E511937B-3D08-4DE1-B1A7-DDA1A774996F}"/>
-              </a:ext>
-            </a:extLst>
-          </p:cNvPr>
-          <p:cNvPicPr>
-            <a:picLocks noChangeAspect="1"/>
-          </p:cNvPicPr>
+      <p:sp>
+        <p:nvSpPr>
+          <p:cNvPr id="18" name="TextBox 17"/>
+          <p:cNvSpPr txBox="1"/>
           <p:nvPr/>
-        </p:nvPicPr>
-        <p:blipFill>
-          <a:blip r:embed="rId2" cstate="hqprint">
-            <a:extLst>
-              <a:ext uri="{28A0092B-C50C-407E-A947-70E740481C1C}">
-                <a14:useLocalDpi xmlns:a14="http://schemas.microsoft.com/office/drawing/2010/main" val="0"/>
-              </a:ext>
-            </a:extLst>
-          </a:blip>
-          <a:stretch>
-            <a:fillRect/>
-          </a:stretch>
-        </p:blipFill>
-        <p:spPr>
-          <a:xfrm>
-            <a:off x="293568" y="235469"/>
-            <a:ext cx="697404" cy="582096"/>
-          </a:xfrm>
-          <a:prstGeom prst="rect">
-            <a:avLst/>
-          </a:prstGeom>
-        </p:spPr>
-      </p:pic>
-      <p:pic>
-        <p:nvPicPr>
-          <p:cNvPr id="48" name="그림 47">
-            <a:extLst>
-              <a:ext uri="{FF2B5EF4-FFF2-40B4-BE49-F238E27FC236}">
-                <a16:creationId xmlns:a16="http://schemas.microsoft.com/office/drawing/2014/main" id="{BAB01020-E592-4308-8821-F33925BC9670}"/>
-              </a:ext>
-            </a:extLst>
-          </p:cNvPr>
-          <p:cNvPicPr>
-            <a:picLocks noChangeAspect="1"/>
-          </p:cNvPicPr>
+        </p:nvSpPr>
+        <p:spPr>
+          <a:xfrm>
+            <a:off x="2697480" y="876299"/>
+            <a:ext cx="1452880" cy="461665"/>
+          </a:xfrm>
+          <a:prstGeom prst="rect">
+            <a:avLst/>
+          </a:prstGeom>
+          <a:noFill/>
+        </p:spPr>
+        <p:txBody>
+          <a:bodyPr wrap="square" rtlCol="0">
+            <a:spAutoFit/>
+          </a:bodyPr>
+          <a:lstStyle/>
+          <a:p>
+            <a:r>
+              <a:rPr lang="ru-RU" sz="2400" b="1" dirty="0" smtClean="0">
+                <a:latin typeface="+mj-lt"/>
+              </a:rPr>
+              <a:t>Задачи</a:t>
+            </a:r>
+            <a:r>
+              <a:rPr lang="en-US" sz="2400" b="1" dirty="0" smtClean="0">
+                <a:latin typeface="+mj-lt"/>
+              </a:rPr>
+              <a:t>:</a:t>
+            </a:r>
+            <a:endParaRPr lang="ru-RU" sz="2400" b="1" dirty="0">
+              <a:latin typeface="+mj-lt"/>
+            </a:endParaRPr>
+          </a:p>
+        </p:txBody>
+      </p:sp>
+      <p:sp>
+        <p:nvSpPr>
+          <p:cNvPr id="4" name="TextBox 3"/>
+          <p:cNvSpPr txBox="1"/>
           <p:nvPr/>
-        </p:nvPicPr>
-        <p:blipFill>
-          <a:blip r:embed="rId3" cstate="hqprint">
-            <a:extLst>
-              <a:ext uri="{28A0092B-C50C-407E-A947-70E740481C1C}">
-                <a14:useLocalDpi xmlns:a14="http://schemas.microsoft.com/office/drawing/2010/main" val="0"/>
-              </a:ext>
-            </a:extLst>
-          </a:blip>
-          <a:stretch>
-            <a:fillRect/>
-          </a:stretch>
-        </p:blipFill>
-        <p:spPr>
-          <a:xfrm>
-            <a:off x="11395470" y="5472968"/>
-            <a:ext cx="741101" cy="737778"/>
-          </a:xfrm>
-          <a:prstGeom prst="rect">
-            <a:avLst/>
-          </a:prstGeom>
-        </p:spPr>
-      </p:pic>
-      <p:pic>
-        <p:nvPicPr>
-          <p:cNvPr id="49" name="그림 48">
-            <a:extLst>
-              <a:ext uri="{FF2B5EF4-FFF2-40B4-BE49-F238E27FC236}">
-                <a16:creationId xmlns:a16="http://schemas.microsoft.com/office/drawing/2014/main" id="{C47F7945-A610-40A1-9F6D-D51CF9FF432E}"/>
-              </a:ext>
-            </a:extLst>
-          </p:cNvPr>
-          <p:cNvPicPr>
-            <a:picLocks noChangeAspect="1"/>
-          </p:cNvPicPr>
+        </p:nvSpPr>
+        <p:spPr>
+          <a:xfrm>
+            <a:off x="2697480" y="1253995"/>
+            <a:ext cx="8462700" cy="4524315"/>
+          </a:xfrm>
+          <a:prstGeom prst="rect">
+            <a:avLst/>
+          </a:prstGeom>
+          <a:noFill/>
+        </p:spPr>
+        <p:txBody>
+          <a:bodyPr wrap="square" rtlCol="0">
+            <a:spAutoFit/>
+          </a:bodyPr>
+          <a:lstStyle/>
+          <a:p>
+            <a:r>
+              <a:rPr lang="en-US" sz="1600" dirty="0" smtClean="0"/>
+              <a:t>1.</a:t>
+            </a:r>
+            <a:r>
+              <a:rPr lang="ru-RU" sz="1600" dirty="0" smtClean="0"/>
+              <a:t> </a:t>
+            </a:r>
+            <a:r>
+              <a:rPr lang="ru-RU" sz="1600" dirty="0"/>
+              <a:t>Изучить предметную область организации путешествий и подготовки списков необходимых вещей.</a:t>
+            </a:r>
+          </a:p>
+          <a:p>
+            <a:r>
+              <a:rPr lang="en-US" sz="1600" dirty="0" smtClean="0"/>
+              <a:t>2.</a:t>
+            </a:r>
+            <a:r>
+              <a:rPr lang="ru-RU" sz="1600" dirty="0" smtClean="0"/>
+              <a:t>Разработать </a:t>
+            </a:r>
+            <a:r>
+              <a:rPr lang="ru-RU" sz="1600" dirty="0" err="1"/>
+              <a:t>desktop</a:t>
+            </a:r>
+            <a:r>
+              <a:rPr lang="ru-RU" sz="1600" dirty="0"/>
+              <a:t>-приложение для удобного создания и ведения чек-листов путешествий.</a:t>
+            </a:r>
+          </a:p>
+          <a:p>
+            <a:r>
+              <a:rPr lang="en-US" sz="1600" dirty="0" smtClean="0"/>
+              <a:t>3.</a:t>
+            </a:r>
+            <a:r>
+              <a:rPr lang="ru-RU" sz="1600" dirty="0" smtClean="0"/>
+              <a:t>Создать </a:t>
+            </a:r>
+            <a:r>
+              <a:rPr lang="ru-RU" sz="1600" dirty="0"/>
+              <a:t>удобный и интуитивно понятный графический интерфейс пользователя.</a:t>
+            </a:r>
+          </a:p>
+          <a:p>
+            <a:r>
+              <a:rPr lang="en-US" sz="1600" dirty="0" smtClean="0"/>
+              <a:t>4.</a:t>
+            </a:r>
+            <a:r>
+              <a:rPr lang="ru-RU" sz="1600" dirty="0" smtClean="0"/>
+              <a:t>Реализовать </a:t>
+            </a:r>
+            <a:r>
+              <a:rPr lang="ru-RU" sz="1600" dirty="0"/>
+              <a:t>систему готовых шаблонов для различных типов </a:t>
+            </a:r>
+            <a:r>
+              <a:rPr lang="ru-RU" sz="1600" dirty="0" smtClean="0"/>
+              <a:t>поездок:</a:t>
+            </a:r>
+          </a:p>
+          <a:p>
+            <a:r>
+              <a:rPr lang="ru-RU" sz="1600" dirty="0" smtClean="0"/>
+              <a:t>пляжный отдых</a:t>
+            </a:r>
+            <a:r>
+              <a:rPr lang="en-US" sz="1600" dirty="0" smtClean="0"/>
+              <a:t>,</a:t>
+            </a:r>
+            <a:r>
+              <a:rPr lang="ru-RU" sz="1600" dirty="0" smtClean="0"/>
+              <a:t>поход</a:t>
+            </a:r>
+            <a:r>
+              <a:rPr lang="en-US" sz="1600" dirty="0" smtClean="0"/>
+              <a:t>,</a:t>
+            </a:r>
+            <a:r>
+              <a:rPr lang="ru-RU" sz="1600" dirty="0" smtClean="0"/>
+              <a:t>командировка</a:t>
+            </a:r>
+            <a:r>
+              <a:rPr lang="ru-RU" sz="1600" dirty="0"/>
+              <a:t>.</a:t>
+            </a:r>
+          </a:p>
+          <a:p>
+            <a:r>
+              <a:rPr lang="ru-RU" sz="1600" dirty="0"/>
+              <a:t>5. Реализовать возможность управления категориями </a:t>
+            </a:r>
+            <a:r>
+              <a:rPr lang="ru-RU" sz="1600" dirty="0" err="1" smtClean="0"/>
+              <a:t>вещей:добавление</a:t>
+            </a:r>
+            <a:r>
+              <a:rPr lang="ru-RU" sz="1600" dirty="0" smtClean="0"/>
+              <a:t> категорий</a:t>
+            </a:r>
+            <a:r>
+              <a:rPr lang="en-US" sz="1600" dirty="0" smtClean="0"/>
+              <a:t>,</a:t>
+            </a:r>
+            <a:r>
+              <a:rPr lang="ru-RU" sz="1600" dirty="0" smtClean="0"/>
+              <a:t>удаление </a:t>
+            </a:r>
+            <a:r>
+              <a:rPr lang="ru-RU" sz="1600" dirty="0"/>
+              <a:t>категорий.</a:t>
+            </a:r>
+          </a:p>
+          <a:p>
+            <a:r>
+              <a:rPr lang="ru-RU" sz="1600" dirty="0"/>
+              <a:t>6. Реализовать возможность управления списком </a:t>
+            </a:r>
+            <a:r>
+              <a:rPr lang="ru-RU" sz="1600" dirty="0" err="1" smtClean="0"/>
+              <a:t>вещей:добавление</a:t>
+            </a:r>
+            <a:r>
+              <a:rPr lang="ru-RU" sz="1600" dirty="0" smtClean="0"/>
+              <a:t> вещей</a:t>
+            </a:r>
+            <a:r>
+              <a:rPr lang="en-US" sz="1600" dirty="0" smtClean="0"/>
+              <a:t>,</a:t>
+            </a:r>
+            <a:r>
+              <a:rPr lang="ru-RU" sz="1600" dirty="0" smtClean="0"/>
+              <a:t>удаление вещей</a:t>
+            </a:r>
+            <a:r>
+              <a:rPr lang="en-US" sz="1600" dirty="0" smtClean="0"/>
+              <a:t>,</a:t>
+            </a:r>
+            <a:r>
+              <a:rPr lang="ru-RU" sz="1600" dirty="0" smtClean="0"/>
+              <a:t>просмотр </a:t>
+            </a:r>
+            <a:r>
+              <a:rPr lang="ru-RU" sz="1600" dirty="0"/>
+              <a:t>списка вещей.</a:t>
+            </a:r>
+          </a:p>
+          <a:p>
+            <a:r>
+              <a:rPr lang="ru-RU" sz="1600" dirty="0"/>
+              <a:t>7. Реализовать механизм отметки собранных вещей с помощью </a:t>
+            </a:r>
+            <a:r>
+              <a:rPr lang="ru-RU" sz="1600" dirty="0" err="1"/>
+              <a:t>чекбоксов</a:t>
+            </a:r>
+            <a:r>
+              <a:rPr lang="ru-RU" sz="1600" dirty="0"/>
+              <a:t>.</a:t>
+            </a:r>
+          </a:p>
+          <a:p>
+            <a:r>
+              <a:rPr lang="en-US" sz="1600" dirty="0"/>
+              <a:t>8</a:t>
+            </a:r>
+            <a:r>
+              <a:rPr lang="ru-RU" sz="1600" dirty="0" smtClean="0"/>
+              <a:t>. </a:t>
+            </a:r>
+            <a:r>
+              <a:rPr lang="ru-RU" sz="1600" dirty="0"/>
+              <a:t>Обеспечить корректную работу приложения при большом количестве категорий и элементов за счёт использования прокрутки.</a:t>
+            </a:r>
+          </a:p>
+          <a:p>
+            <a:r>
+              <a:rPr lang="en-US" sz="1600" dirty="0"/>
+              <a:t>9</a:t>
+            </a:r>
+            <a:r>
+              <a:rPr lang="ru-RU" sz="1600" dirty="0" smtClean="0"/>
+              <a:t>. </a:t>
+            </a:r>
+            <a:r>
+              <a:rPr lang="ru-RU" sz="1600" dirty="0"/>
+              <a:t>Реализовать функции массового управления списком</a:t>
+            </a:r>
+            <a:r>
+              <a:rPr lang="ru-RU" sz="1600" dirty="0" smtClean="0"/>
+              <a:t>:</a:t>
+            </a:r>
+            <a:endParaRPr lang="ru-RU" sz="1600" dirty="0"/>
+          </a:p>
+          <a:p>
+            <a:r>
+              <a:rPr lang="ru-RU" sz="1600" dirty="0"/>
+              <a:t>* отметить все вещи;</a:t>
+            </a:r>
+          </a:p>
+          <a:p>
+            <a:r>
+              <a:rPr lang="ru-RU" sz="1600" dirty="0"/>
+              <a:t>* снять все отметки;</a:t>
+            </a:r>
+          </a:p>
+          <a:p>
+            <a:r>
+              <a:rPr lang="ru-RU" sz="1600" dirty="0"/>
+              <a:t>* очистить список вещей</a:t>
+            </a:r>
+            <a:r>
+              <a:rPr lang="ru-RU" sz="1600" dirty="0" smtClean="0"/>
+              <a:t>.</a:t>
+            </a:r>
+            <a:endParaRPr lang="ru-RU" sz="1600" dirty="0"/>
+          </a:p>
+        </p:txBody>
+      </p:sp>
+      <p:cxnSp>
+        <p:nvCxnSpPr>
+          <p:cNvPr id="6" name="Прямая соединительная линия 5"/>
+          <p:cNvCxnSpPr/>
           <p:nvPr/>
-        </p:nvPicPr>
-        <p:blipFill>
-          <a:blip r:embed="rId4" cstate="hqprint">
-            <a:extLst>
-              <a:ext uri="{28A0092B-C50C-407E-A947-70E740481C1C}">
-                <a14:useLocalDpi xmlns:a14="http://schemas.microsoft.com/office/drawing/2010/main" val="0"/>
-              </a:ext>
-            </a:extLst>
-          </a:blip>
-          <a:stretch>
-            <a:fillRect/>
-          </a:stretch>
-        </p:blipFill>
-        <p:spPr>
-          <a:xfrm>
-            <a:off x="8143484" y="54430"/>
-            <a:ext cx="742762" cy="727807"/>
-          </a:xfrm>
-          <a:prstGeom prst="rect">
-            <a:avLst/>
-          </a:prstGeom>
-        </p:spPr>
-      </p:pic>
+        </p:nvCxnSpPr>
+        <p:spPr>
+          <a:xfrm flipH="1">
+            <a:off x="2455600" y="952500"/>
+            <a:ext cx="27940" cy="4564708"/>
+          </a:xfrm>
+          <a:prstGeom prst="line">
+            <a:avLst/>
+          </a:prstGeom>
+          <a:ln/>
+        </p:spPr>
+        <p:style>
+          <a:lnRef idx="3">
+            <a:schemeClr val="dk1"/>
+          </a:lnRef>
+          <a:fillRef idx="0">
+            <a:schemeClr val="dk1"/>
+          </a:fillRef>
+          <a:effectRef idx="2">
+            <a:schemeClr val="dk1"/>
+          </a:effectRef>
+          <a:fontRef idx="minor">
+            <a:schemeClr val="tx1"/>
+          </a:fontRef>
+        </p:style>
+      </p:cxnSp>
     </p:spTree>
     <p:extLst>
       <p:ext uri="{BB962C8B-B14F-4D97-AF65-F5344CB8AC3E}">
-        <p14:creationId xmlns:p14="http://schemas.microsoft.com/office/powerpoint/2010/main" val="2835110224"/>
+        <p14:creationId xmlns:p14="http://schemas.microsoft.com/office/powerpoint/2010/main" val="2249069952"/>
       </p:ext>
     </p:extLst>
   </p:cSld>
@@ -7536,22 +7459,22 @@
       </p:grpSpPr>
       <p:sp>
         <p:nvSpPr>
-          <p:cNvPr id="33" name="Скругленный прямоугольник 32"/>
+          <p:cNvPr id="2" name="Скругленный прямоугольник 1"/>
           <p:cNvSpPr/>
           <p:nvPr/>
         </p:nvSpPr>
         <p:spPr>
           <a:xfrm>
-            <a:off x="538480" y="715965"/>
-            <a:ext cx="11145520" cy="5725475"/>
+            <a:off x="619760" y="701040"/>
+            <a:ext cx="11033760" cy="5557520"/>
           </a:xfrm>
           <a:prstGeom prst="roundRect">
             <a:avLst/>
           </a:prstGeom>
           <a:solidFill>
-            <a:schemeClr val="bg1">
-              <a:alpha val="50196"/>
-            </a:schemeClr>
+            <a:srgbClr val="FFFFFF">
+              <a:alpha val="60000"/>
+            </a:srgbClr>
           </a:solidFill>
           <a:ln w="3175" cap="flat">
             <a:noFill/>
@@ -7575,14 +7498,20 @@
       </p:sp>
       <p:sp>
         <p:nvSpPr>
-          <p:cNvPr id="2" name="TextBox 1"/>
+          <p:cNvPr id="14" name="TextBox 13">
+            <a:extLst>
+              <a:ext uri="{FF2B5EF4-FFF2-40B4-BE49-F238E27FC236}">
+                <a16:creationId xmlns:a16="http://schemas.microsoft.com/office/drawing/2014/main" id="{2DC454C0-869F-456D-A853-327405F2BB8A}"/>
+              </a:ext>
+            </a:extLst>
+          </p:cNvPr>
           <p:cNvSpPr txBox="1"/>
           <p:nvPr/>
         </p:nvSpPr>
         <p:spPr>
           <a:xfrm>
-            <a:off x="889000" y="1268492"/>
-            <a:ext cx="1566600" cy="3293209"/>
+            <a:off x="3677136" y="1285312"/>
+            <a:ext cx="4837729" cy="646331"/>
           </a:xfrm>
           <a:prstGeom prst="rect">
             <a:avLst/>
@@ -7595,25 +7524,37 @@
           </a:bodyPr>
           <a:lstStyle/>
           <a:p>
-            <a:r>
-              <a:rPr lang="ru-RU" sz="1600" dirty="0">
+            <a:pPr algn="ctr"/>
+            <a:r>
+              <a:rPr lang="ru-RU" altLang="ko-KR" sz="3600" dirty="0" smtClean="0">
+                <a:latin typeface="+mj-lt"/>
                 <a:cs typeface="Arial" panose="020B0604020202020204" pitchFamily="34" charset="0"/>
               </a:rPr>
-              <a:t>Разработка настольного приложения для составления персонализированных чек-листов путешественника с поддержкой категорий, готовых шаблонов и сохранением списков в файл.</a:t>
-            </a:r>
+              <a:t>Актуальность</a:t>
+            </a:r>
+            <a:endParaRPr lang="ko-KR" altLang="en-US" sz="3600" dirty="0">
+              <a:latin typeface="+mj-lt"/>
+              <a:cs typeface="Arial" panose="020B0604020202020204" pitchFamily="34" charset="0"/>
+            </a:endParaRPr>
           </a:p>
         </p:txBody>
       </p:sp>
       <p:sp>
         <p:nvSpPr>
-          <p:cNvPr id="3" name="TextBox 2"/>
+          <p:cNvPr id="13" name="TextBox 12">
+            <a:extLst>
+              <a:ext uri="{FF2B5EF4-FFF2-40B4-BE49-F238E27FC236}">
+                <a16:creationId xmlns:a16="http://schemas.microsoft.com/office/drawing/2014/main" id="{E2A788A2-9C16-4D17-B7A2-BDACEDE5D3C1}"/>
+              </a:ext>
+            </a:extLst>
+          </p:cNvPr>
           <p:cNvSpPr txBox="1"/>
           <p:nvPr/>
         </p:nvSpPr>
         <p:spPr>
           <a:xfrm>
-            <a:off x="861060" y="876300"/>
-            <a:ext cx="1452880" cy="461665"/>
+            <a:off x="1573790" y="2267026"/>
+            <a:ext cx="8890160" cy="3354765"/>
           </a:xfrm>
           <a:prstGeom prst="rect">
             <a:avLst/>
@@ -7624,344 +7565,61 @@
           <a:bodyPr wrap="square" rtlCol="0">
             <a:spAutoFit/>
           </a:bodyPr>
-          <a:lstStyle/>
-          <a:p>
-            <a:r>
-              <a:rPr lang="ru-RU" sz="2400" b="1" dirty="0" smtClean="0">
-                <a:latin typeface="+mj-lt"/>
-              </a:rPr>
-              <a:t>Цель</a:t>
-            </a:r>
-            <a:r>
-              <a:rPr lang="en-US" sz="2400" b="1" dirty="0" smtClean="0">
-                <a:latin typeface="+mj-lt"/>
-              </a:rPr>
-              <a:t>:</a:t>
-            </a:r>
-            <a:endParaRPr lang="ru-RU" sz="2400" b="1" dirty="0">
-              <a:latin typeface="+mj-lt"/>
+          <a:lstStyle>
+            <a:defPPr>
+              <a:defRPr lang="ko-KR"/>
+            </a:defPPr>
+            <a:lvl1pPr algn="just">
+              <a:lnSpc>
+                <a:spcPct val="150000"/>
+              </a:lnSpc>
+              <a:defRPr sz="1100">
+                <a:solidFill>
+                  <a:schemeClr val="tx1">
+                    <a:lumMod val="75000"/>
+                    <a:lumOff val="25000"/>
+                  </a:schemeClr>
+                </a:solidFill>
+              </a:defRPr>
+            </a:lvl1pPr>
+          </a:lstStyle>
+          <a:p>
+            <a:pPr algn="ctr">
+              <a:lnSpc>
+                <a:spcPct val="100000"/>
+              </a:lnSpc>
+            </a:pPr>
+            <a:r>
+              <a:rPr lang="ru-RU" sz="2000" dirty="0"/>
+              <a:t>В современном ритме жизни подготовка к поездке часто сопровождается стрессом и риском забыть важные вещи. Цифровые списки помогают структурировать процесс сборов, снижают вероятность ошибок и экономят время. Большинство существующих решений (заметки, текстовые файлы или универсальные планировщики) либо не адаптированы под специфику путешествий, либо перегружены функциями. Данное приложение предлагает простой и наглядный способ управления чек-листами с возможностью быстрого выбора шаблона (пляж, поход, командировка) и создания собственных категорий. Приложение не требует подключения к интернету и работает на любом компьютере с установленным </a:t>
+            </a:r>
+            <a:r>
+              <a:rPr lang="ru-RU" sz="2000" dirty="0" err="1"/>
+              <a:t>Python</a:t>
+            </a:r>
+            <a:r>
+              <a:rPr lang="ru-RU" sz="2000" dirty="0"/>
+              <a:t>.</a:t>
+            </a:r>
+          </a:p>
+          <a:p>
+            <a:pPr algn="ctr">
+              <a:lnSpc>
+                <a:spcPct val="100000"/>
+              </a:lnSpc>
+            </a:pPr>
+            <a:endParaRPr lang="ko-KR" altLang="en-US" sz="1200" dirty="0">
+              <a:solidFill>
+                <a:schemeClr val="tx1"/>
+              </a:solidFill>
             </a:endParaRPr>
           </a:p>
         </p:txBody>
       </p:sp>
-      <p:sp>
-        <p:nvSpPr>
-          <p:cNvPr id="18" name="TextBox 17"/>
-          <p:cNvSpPr txBox="1"/>
-          <p:nvPr/>
-        </p:nvSpPr>
-        <p:spPr>
-          <a:xfrm>
-            <a:off x="2697480" y="876299"/>
-            <a:ext cx="1452880" cy="461665"/>
-          </a:xfrm>
-          <a:prstGeom prst="rect">
-            <a:avLst/>
-          </a:prstGeom>
-          <a:noFill/>
-        </p:spPr>
-        <p:txBody>
-          <a:bodyPr wrap="square" rtlCol="0">
-            <a:spAutoFit/>
-          </a:bodyPr>
-          <a:lstStyle/>
-          <a:p>
-            <a:r>
-              <a:rPr lang="ru-RU" sz="2400" b="1" dirty="0" smtClean="0">
-                <a:latin typeface="+mj-lt"/>
-              </a:rPr>
-              <a:t>Задачи</a:t>
-            </a:r>
-            <a:r>
-              <a:rPr lang="en-US" sz="2400" b="1" dirty="0" smtClean="0">
-                <a:latin typeface="+mj-lt"/>
-              </a:rPr>
-              <a:t>:</a:t>
-            </a:r>
-            <a:endParaRPr lang="ru-RU" sz="2400" b="1" dirty="0">
-              <a:latin typeface="+mj-lt"/>
-            </a:endParaRPr>
-          </a:p>
-        </p:txBody>
-      </p:sp>
-      <p:sp>
-        <p:nvSpPr>
-          <p:cNvPr id="4" name="TextBox 3"/>
-          <p:cNvSpPr txBox="1"/>
-          <p:nvPr/>
-        </p:nvSpPr>
-        <p:spPr>
-          <a:xfrm>
-            <a:off x="2697480" y="1253995"/>
-            <a:ext cx="8462700" cy="4524315"/>
-          </a:xfrm>
-          <a:prstGeom prst="rect">
-            <a:avLst/>
-          </a:prstGeom>
-          <a:noFill/>
-        </p:spPr>
-        <p:txBody>
-          <a:bodyPr wrap="square" rtlCol="0">
-            <a:spAutoFit/>
-          </a:bodyPr>
-          <a:lstStyle/>
-          <a:p>
-            <a:r>
-              <a:rPr lang="en-US" sz="1600" dirty="0" smtClean="0"/>
-              <a:t>1.</a:t>
-            </a:r>
-            <a:r>
-              <a:rPr lang="ru-RU" sz="1600" dirty="0" smtClean="0"/>
-              <a:t> </a:t>
-            </a:r>
-            <a:r>
-              <a:rPr lang="ru-RU" sz="1600" dirty="0"/>
-              <a:t>Изучить предметную область организации путешествий и подготовки списков необходимых вещей.</a:t>
-            </a:r>
-          </a:p>
-          <a:p>
-            <a:r>
-              <a:rPr lang="en-US" sz="1600" dirty="0" smtClean="0"/>
-              <a:t>2.</a:t>
-            </a:r>
-            <a:r>
-              <a:rPr lang="ru-RU" sz="1600" dirty="0" smtClean="0"/>
-              <a:t>Разработать </a:t>
-            </a:r>
-            <a:r>
-              <a:rPr lang="ru-RU" sz="1600" dirty="0" err="1"/>
-              <a:t>desktop</a:t>
-            </a:r>
-            <a:r>
-              <a:rPr lang="ru-RU" sz="1600" dirty="0"/>
-              <a:t>-приложение для удобного создания и ведения чек-листов путешествий.</a:t>
-            </a:r>
-          </a:p>
-          <a:p>
-            <a:r>
-              <a:rPr lang="en-US" sz="1600" dirty="0" smtClean="0"/>
-              <a:t>3.</a:t>
-            </a:r>
-            <a:r>
-              <a:rPr lang="ru-RU" sz="1600" dirty="0" smtClean="0"/>
-              <a:t>Создать </a:t>
-            </a:r>
-            <a:r>
-              <a:rPr lang="ru-RU" sz="1600" dirty="0"/>
-              <a:t>удобный и интуитивно понятный графический интерфейс пользователя.</a:t>
-            </a:r>
-          </a:p>
-          <a:p>
-            <a:r>
-              <a:rPr lang="en-US" sz="1600" dirty="0" smtClean="0"/>
-              <a:t>4.</a:t>
-            </a:r>
-            <a:r>
-              <a:rPr lang="ru-RU" sz="1600" dirty="0" smtClean="0"/>
-              <a:t>Реализовать </a:t>
-            </a:r>
-            <a:r>
-              <a:rPr lang="ru-RU" sz="1600" dirty="0"/>
-              <a:t>систему готовых шаблонов для различных типов </a:t>
-            </a:r>
-            <a:r>
-              <a:rPr lang="ru-RU" sz="1600" dirty="0" smtClean="0"/>
-              <a:t>поездок:</a:t>
-            </a:r>
-          </a:p>
-          <a:p>
-            <a:r>
-              <a:rPr lang="ru-RU" sz="1600" dirty="0" smtClean="0"/>
-              <a:t>пляжный отдых</a:t>
-            </a:r>
-            <a:r>
-              <a:rPr lang="en-US" sz="1600" dirty="0" smtClean="0"/>
-              <a:t>,</a:t>
-            </a:r>
-            <a:r>
-              <a:rPr lang="ru-RU" sz="1600" dirty="0" smtClean="0"/>
-              <a:t>поход</a:t>
-            </a:r>
-            <a:r>
-              <a:rPr lang="en-US" sz="1600" dirty="0" smtClean="0"/>
-              <a:t>,</a:t>
-            </a:r>
-            <a:r>
-              <a:rPr lang="ru-RU" sz="1600" dirty="0" smtClean="0"/>
-              <a:t>командировка</a:t>
-            </a:r>
-            <a:r>
-              <a:rPr lang="ru-RU" sz="1600" dirty="0"/>
-              <a:t>.</a:t>
-            </a:r>
-          </a:p>
-          <a:p>
-            <a:r>
-              <a:rPr lang="ru-RU" sz="1600" dirty="0"/>
-              <a:t>5. Реализовать возможность управления категориями </a:t>
-            </a:r>
-            <a:r>
-              <a:rPr lang="ru-RU" sz="1600" dirty="0" err="1" smtClean="0"/>
-              <a:t>вещей:добавление</a:t>
-            </a:r>
-            <a:r>
-              <a:rPr lang="ru-RU" sz="1600" dirty="0" smtClean="0"/>
-              <a:t> категорий</a:t>
-            </a:r>
-            <a:r>
-              <a:rPr lang="en-US" sz="1600" dirty="0" smtClean="0"/>
-              <a:t>,</a:t>
-            </a:r>
-            <a:r>
-              <a:rPr lang="ru-RU" sz="1600" dirty="0" smtClean="0"/>
-              <a:t>удаление </a:t>
-            </a:r>
-            <a:r>
-              <a:rPr lang="ru-RU" sz="1600" dirty="0"/>
-              <a:t>категорий.</a:t>
-            </a:r>
-          </a:p>
-          <a:p>
-            <a:r>
-              <a:rPr lang="ru-RU" sz="1600" dirty="0"/>
-              <a:t>6. Реализовать возможность управления списком </a:t>
-            </a:r>
-            <a:r>
-              <a:rPr lang="ru-RU" sz="1600" dirty="0" err="1" smtClean="0"/>
-              <a:t>вещей:добавление</a:t>
-            </a:r>
-            <a:r>
-              <a:rPr lang="ru-RU" sz="1600" dirty="0" smtClean="0"/>
-              <a:t> вещей</a:t>
-            </a:r>
-            <a:r>
-              <a:rPr lang="en-US" sz="1600" dirty="0" smtClean="0"/>
-              <a:t>,</a:t>
-            </a:r>
-            <a:r>
-              <a:rPr lang="ru-RU" sz="1600" dirty="0" smtClean="0"/>
-              <a:t>удаление вещей</a:t>
-            </a:r>
-            <a:r>
-              <a:rPr lang="en-US" sz="1600" dirty="0" smtClean="0"/>
-              <a:t>,</a:t>
-            </a:r>
-            <a:r>
-              <a:rPr lang="ru-RU" sz="1600" dirty="0" smtClean="0"/>
-              <a:t>просмотр </a:t>
-            </a:r>
-            <a:r>
-              <a:rPr lang="ru-RU" sz="1600" dirty="0"/>
-              <a:t>списка вещей.</a:t>
-            </a:r>
-          </a:p>
-          <a:p>
-            <a:r>
-              <a:rPr lang="ru-RU" sz="1600" dirty="0"/>
-              <a:t>7. Реализовать механизм отметки собранных вещей с помощью </a:t>
-            </a:r>
-            <a:r>
-              <a:rPr lang="ru-RU" sz="1600" dirty="0" err="1"/>
-              <a:t>чекбоксов</a:t>
-            </a:r>
-            <a:r>
-              <a:rPr lang="ru-RU" sz="1600" dirty="0"/>
-              <a:t>.</a:t>
-            </a:r>
-          </a:p>
-          <a:p>
-            <a:r>
-              <a:rPr lang="en-US" sz="1600" dirty="0"/>
-              <a:t>8</a:t>
-            </a:r>
-            <a:r>
-              <a:rPr lang="ru-RU" sz="1600" dirty="0" smtClean="0"/>
-              <a:t>. </a:t>
-            </a:r>
-            <a:r>
-              <a:rPr lang="ru-RU" sz="1600" dirty="0"/>
-              <a:t>Обеспечить корректную работу приложения при большом количестве категорий и элементов за счёт использования прокрутки.</a:t>
-            </a:r>
-          </a:p>
-          <a:p>
-            <a:r>
-              <a:rPr lang="en-US" sz="1600" dirty="0"/>
-              <a:t>9</a:t>
-            </a:r>
-            <a:r>
-              <a:rPr lang="ru-RU" sz="1600" dirty="0" smtClean="0"/>
-              <a:t>. </a:t>
-            </a:r>
-            <a:r>
-              <a:rPr lang="ru-RU" sz="1600" dirty="0"/>
-              <a:t>Реализовать функции массового управления списком</a:t>
-            </a:r>
-            <a:r>
-              <a:rPr lang="ru-RU" sz="1600" dirty="0" smtClean="0"/>
-              <a:t>:</a:t>
-            </a:r>
-            <a:endParaRPr lang="ru-RU" sz="1600" dirty="0"/>
-          </a:p>
-          <a:p>
-            <a:r>
-              <a:rPr lang="ru-RU" sz="1600" dirty="0"/>
-              <a:t>* отметить все вещи;</a:t>
-            </a:r>
-          </a:p>
-          <a:p>
-            <a:r>
-              <a:rPr lang="ru-RU" sz="1600" dirty="0"/>
-              <a:t>* снять все отметки;</a:t>
-            </a:r>
-          </a:p>
-          <a:p>
-            <a:r>
-              <a:rPr lang="ru-RU" sz="1600" dirty="0"/>
-              <a:t>* очистить список вещей</a:t>
-            </a:r>
-            <a:r>
-              <a:rPr lang="ru-RU" sz="1600" dirty="0" smtClean="0"/>
-              <a:t>.</a:t>
-            </a:r>
-            <a:endParaRPr lang="ru-RU" sz="1600" dirty="0"/>
-          </a:p>
-        </p:txBody>
-      </p:sp>
-      <p:cxnSp>
-        <p:nvCxnSpPr>
-          <p:cNvPr id="6" name="Прямая соединительная линия 5"/>
-          <p:cNvCxnSpPr/>
-          <p:nvPr/>
-        </p:nvCxnSpPr>
-        <p:spPr>
-          <a:xfrm flipH="1">
-            <a:off x="2455600" y="952500"/>
-            <a:ext cx="27940" cy="4564708"/>
-          </a:xfrm>
-          <a:prstGeom prst="line">
-            <a:avLst/>
-          </a:prstGeom>
-          <a:ln/>
-        </p:spPr>
-        <p:style>
-          <a:lnRef idx="3">
-            <a:schemeClr val="dk1"/>
-          </a:lnRef>
-          <a:fillRef idx="0">
-            <a:schemeClr val="dk1"/>
-          </a:fillRef>
-          <a:effectRef idx="2">
-            <a:schemeClr val="dk1"/>
-          </a:effectRef>
-          <a:fontRef idx="minor">
-            <a:schemeClr val="tx1"/>
-          </a:fontRef>
-        </p:style>
-      </p:cxnSp>
     </p:spTree>
     <p:extLst>
       <p:ext uri="{BB962C8B-B14F-4D97-AF65-F5344CB8AC3E}">
-        <p14:creationId xmlns:p14="http://schemas.microsoft.com/office/powerpoint/2010/main" val="2249069952"/>
+        <p14:creationId xmlns:p14="http://schemas.microsoft.com/office/powerpoint/2010/main" val="2952168859"/>
       </p:ext>
     </p:extLst>
   </p:cSld>
@@ -8003,16 +7661,16 @@
         </p:nvSpPr>
         <p:spPr>
           <a:xfrm>
-            <a:off x="619760" y="701040"/>
-            <a:ext cx="11033760" cy="5557520"/>
+            <a:off x="548640" y="817565"/>
+            <a:ext cx="11145520" cy="5725475"/>
           </a:xfrm>
           <a:prstGeom prst="roundRect">
             <a:avLst/>
           </a:prstGeom>
           <a:solidFill>
-            <a:srgbClr val="FFFFFF">
-              <a:alpha val="60000"/>
-            </a:srgbClr>
+            <a:schemeClr val="bg1">
+              <a:alpha val="50196"/>
+            </a:schemeClr>
           </a:solidFill>
           <a:ln w="3175" cap="flat">
             <a:noFill/>
@@ -8048,7 +7706,7 @@
         </p:nvSpPr>
         <p:spPr>
           <a:xfrm>
-            <a:off x="3677136" y="1285312"/>
+            <a:off x="3600005" y="1112592"/>
             <a:ext cx="4837729" cy="646331"/>
           </a:xfrm>
           <a:prstGeom prst="rect">
@@ -8068,7 +7726,7 @@
                 <a:latin typeface="+mj-lt"/>
                 <a:cs typeface="Arial" panose="020B0604020202020204" pitchFamily="34" charset="0"/>
               </a:rPr>
-              <a:t>Актуальность</a:t>
+              <a:t>Предметная область</a:t>
             </a:r>
             <a:endParaRPr lang="ko-KR" altLang="en-US" sz="3600" dirty="0">
               <a:latin typeface="+mj-lt"/>
@@ -8091,8 +7749,8 @@
         </p:nvSpPr>
         <p:spPr>
           <a:xfrm>
-            <a:off x="1573790" y="2267026"/>
-            <a:ext cx="8890160" cy="3354765"/>
+            <a:off x="642270" y="1686554"/>
+            <a:ext cx="10614959" cy="4708981"/>
           </a:xfrm>
           <a:prstGeom prst="rect">
             <a:avLst/>
@@ -8128,16 +7786,12 @@
               </a:lnSpc>
             </a:pPr>
             <a:r>
-              <a:rPr lang="ru-RU" sz="2000" dirty="0"/>
-              <a:t>В современном ритме жизни подготовка к поездке часто сопровождается стрессом и риском забыть важные вещи. Цифровые списки помогают структурировать процесс сборов, снижают вероятность ошибок и экономят время. Большинство существующих решений (заметки, текстовые файлы или универсальные планировщики) либо не адаптированы под специфику путешествий, либо перегружены функциями. Данное приложение предлагает простой и наглядный способ управления чек-листами с возможностью быстрого выбора шаблона (пляж, поход, командировка) и создания собственных категорий. Приложение не требует подключения к интернету и работает на любом компьютере с установленным </a:t>
-            </a:r>
-            <a:r>
-              <a:rPr lang="ru-RU" sz="2000" dirty="0" err="1"/>
-              <a:t>Python</a:t>
-            </a:r>
-            <a:r>
-              <a:rPr lang="ru-RU" sz="2000" dirty="0"/>
-              <a:t>.</a:t>
+              <a:rPr lang="ru-RU" altLang="ko-KR" sz="2000" dirty="0">
+                <a:solidFill>
+                  <a:schemeClr val="tx1"/>
+                </a:solidFill>
+              </a:rPr>
+              <a:t>Предметной областью проекта является организация подготовки к путешествиям с помощью электронных чек-листов.</a:t>
             </a:r>
           </a:p>
           <a:p>
@@ -8146,18 +7800,232 @@
                 <a:spcPct val="100000"/>
               </a:lnSpc>
             </a:pPr>
-            <a:endParaRPr lang="ko-KR" altLang="en-US" sz="1200" dirty="0">
+            <a:endParaRPr lang="ru-RU" altLang="ko-KR" sz="2000" dirty="0">
               <a:solidFill>
                 <a:schemeClr val="tx1"/>
               </a:solidFill>
             </a:endParaRPr>
           </a:p>
+          <a:p>
+            <a:pPr algn="ctr">
+              <a:lnSpc>
+                <a:spcPct val="100000"/>
+              </a:lnSpc>
+            </a:pPr>
+            <a:r>
+              <a:rPr lang="ru-RU" altLang="ko-KR" sz="2000" dirty="0">
+                <a:solidFill>
+                  <a:schemeClr val="tx1"/>
+                </a:solidFill>
+              </a:rPr>
+              <a:t>Во время подготовки к поездке пользователи часто сталкиваются с проблемой забытых вещей, отсутствием структурированного списка необходимых предметов и неудобством хранения информации. Для решения данной проблемы разрабатывается </a:t>
+            </a:r>
+            <a:r>
+              <a:rPr lang="ru-RU" altLang="ko-KR" sz="2000" dirty="0" err="1">
+                <a:solidFill>
+                  <a:schemeClr val="tx1"/>
+                </a:solidFill>
+              </a:rPr>
+              <a:t>desktop</a:t>
+            </a:r>
+            <a:r>
+              <a:rPr lang="ru-RU" altLang="ko-KR" sz="2000" dirty="0">
+                <a:solidFill>
+                  <a:schemeClr val="tx1"/>
+                </a:solidFill>
+              </a:rPr>
+              <a:t>-приложение «</a:t>
+            </a:r>
+            <a:r>
+              <a:rPr lang="ru-RU" altLang="ko-KR" sz="2000" dirty="0" err="1">
+                <a:solidFill>
+                  <a:schemeClr val="tx1"/>
+                </a:solidFill>
+              </a:rPr>
+              <a:t>TravelPack</a:t>
+            </a:r>
+            <a:r>
+              <a:rPr lang="ru-RU" altLang="ko-KR" sz="2000" dirty="0">
+                <a:solidFill>
+                  <a:schemeClr val="tx1"/>
+                </a:solidFill>
+              </a:rPr>
+              <a:t> — Чек-лист для путешествий».</a:t>
+            </a:r>
+          </a:p>
+          <a:p>
+            <a:pPr algn="ctr">
+              <a:lnSpc>
+                <a:spcPct val="100000"/>
+              </a:lnSpc>
+            </a:pPr>
+            <a:endParaRPr lang="ru-RU" altLang="ko-KR" sz="2000" dirty="0">
+              <a:solidFill>
+                <a:schemeClr val="tx1"/>
+              </a:solidFill>
+            </a:endParaRPr>
+          </a:p>
+          <a:p>
+            <a:pPr algn="ctr">
+              <a:lnSpc>
+                <a:spcPct val="100000"/>
+              </a:lnSpc>
+            </a:pPr>
+            <a:r>
+              <a:rPr lang="ru-RU" altLang="ko-KR" sz="2000" dirty="0">
+                <a:solidFill>
+                  <a:schemeClr val="tx1"/>
+                </a:solidFill>
+              </a:rPr>
+              <a:t>Приложение предназначено для создания, редактирования и хранения списков вещей, необходимых для различных типов поездок. Пользователь может использовать готовые шаблоны путешествий, создавать собственные категории и добавлять нужные предметы.</a:t>
+            </a:r>
+          </a:p>
+          <a:p>
+            <a:pPr algn="ctr">
+              <a:lnSpc>
+                <a:spcPct val="100000"/>
+              </a:lnSpc>
+            </a:pPr>
+            <a:endParaRPr lang="ru-RU" altLang="ko-KR" sz="2000" dirty="0">
+              <a:solidFill>
+                <a:schemeClr val="tx1"/>
+              </a:solidFill>
+            </a:endParaRPr>
+          </a:p>
+          <a:p>
+            <a:pPr algn="ctr">
+              <a:lnSpc>
+                <a:spcPct val="100000"/>
+              </a:lnSpc>
+            </a:pPr>
+            <a:r>
+              <a:rPr lang="ru-RU" altLang="ko-KR" sz="2000" dirty="0">
+                <a:solidFill>
+                  <a:schemeClr val="tx1"/>
+                </a:solidFill>
+              </a:rPr>
+              <a:t>Система помогает упростить процесс сборов, повысить удобство планирования поездок и снизить вероятность забыть важные вещи.</a:t>
+            </a:r>
+            <a:endParaRPr lang="ko-KR" altLang="en-US" sz="2000" dirty="0">
+              <a:solidFill>
+                <a:schemeClr val="tx1"/>
+              </a:solidFill>
+            </a:endParaRPr>
+          </a:p>
         </p:txBody>
       </p:sp>
+      <p:pic>
+        <p:nvPicPr>
+          <p:cNvPr id="47" name="그림 46">
+            <a:extLst>
+              <a:ext uri="{FF2B5EF4-FFF2-40B4-BE49-F238E27FC236}">
+                <a16:creationId xmlns:a16="http://schemas.microsoft.com/office/drawing/2014/main" id="{E511937B-3D08-4DE1-B1A7-DDA1A774996F}"/>
+              </a:ext>
+            </a:extLst>
+          </p:cNvPr>
+          <p:cNvPicPr>
+            <a:picLocks noChangeAspect="1"/>
+          </p:cNvPicPr>
+          <p:nvPr/>
+        </p:nvPicPr>
+        <p:blipFill>
+          <a:blip r:embed="rId2" cstate="hqprint">
+            <a:extLst>
+              <a:ext uri="{28A0092B-C50C-407E-A947-70E740481C1C}">
+                <a14:useLocalDpi xmlns:a14="http://schemas.microsoft.com/office/drawing/2010/main" val="0"/>
+              </a:ext>
+            </a:extLst>
+          </a:blip>
+          <a:stretch>
+            <a:fillRect/>
+          </a:stretch>
+        </p:blipFill>
+        <p:spPr>
+          <a:xfrm>
+            <a:off x="293568" y="235469"/>
+            <a:ext cx="697404" cy="582096"/>
+          </a:xfrm>
+          <a:prstGeom prst="rect">
+            <a:avLst/>
+          </a:prstGeom>
+        </p:spPr>
+      </p:pic>
+      <p:pic>
+        <p:nvPicPr>
+          <p:cNvPr id="48" name="그림 47">
+            <a:extLst>
+              <a:ext uri="{FF2B5EF4-FFF2-40B4-BE49-F238E27FC236}">
+                <a16:creationId xmlns:a16="http://schemas.microsoft.com/office/drawing/2014/main" id="{BAB01020-E592-4308-8821-F33925BC9670}"/>
+              </a:ext>
+            </a:extLst>
+          </p:cNvPr>
+          <p:cNvPicPr>
+            <a:picLocks noChangeAspect="1"/>
+          </p:cNvPicPr>
+          <p:nvPr/>
+        </p:nvPicPr>
+        <p:blipFill>
+          <a:blip r:embed="rId3" cstate="hqprint">
+            <a:extLst>
+              <a:ext uri="{28A0092B-C50C-407E-A947-70E740481C1C}">
+                <a14:useLocalDpi xmlns:a14="http://schemas.microsoft.com/office/drawing/2010/main" val="0"/>
+              </a:ext>
+            </a:extLst>
+          </a:blip>
+          <a:stretch>
+            <a:fillRect/>
+          </a:stretch>
+        </p:blipFill>
+        <p:spPr>
+          <a:xfrm>
+            <a:off x="11395470" y="5472968"/>
+            <a:ext cx="741101" cy="737778"/>
+          </a:xfrm>
+          <a:prstGeom prst="rect">
+            <a:avLst/>
+          </a:prstGeom>
+        </p:spPr>
+      </p:pic>
+      <p:pic>
+        <p:nvPicPr>
+          <p:cNvPr id="49" name="그림 48">
+            <a:extLst>
+              <a:ext uri="{FF2B5EF4-FFF2-40B4-BE49-F238E27FC236}">
+                <a16:creationId xmlns:a16="http://schemas.microsoft.com/office/drawing/2014/main" id="{C47F7945-A610-40A1-9F6D-D51CF9FF432E}"/>
+              </a:ext>
+            </a:extLst>
+          </p:cNvPr>
+          <p:cNvPicPr>
+            <a:picLocks noChangeAspect="1"/>
+          </p:cNvPicPr>
+          <p:nvPr/>
+        </p:nvPicPr>
+        <p:blipFill>
+          <a:blip r:embed="rId4" cstate="hqprint">
+            <a:extLst>
+              <a:ext uri="{28A0092B-C50C-407E-A947-70E740481C1C}">
+                <a14:useLocalDpi xmlns:a14="http://schemas.microsoft.com/office/drawing/2010/main" val="0"/>
+              </a:ext>
+            </a:extLst>
+          </a:blip>
+          <a:stretch>
+            <a:fillRect/>
+          </a:stretch>
+        </p:blipFill>
+        <p:spPr>
+          <a:xfrm>
+            <a:off x="8143484" y="54430"/>
+            <a:ext cx="742762" cy="727807"/>
+          </a:xfrm>
+          <a:prstGeom prst="rect">
+            <a:avLst/>
+          </a:prstGeom>
+        </p:spPr>
+      </p:pic>
     </p:spTree>
     <p:extLst>
       <p:ext uri="{BB962C8B-B14F-4D97-AF65-F5344CB8AC3E}">
-        <p14:creationId xmlns:p14="http://schemas.microsoft.com/office/powerpoint/2010/main" val="2952168859"/>
+        <p14:creationId xmlns:p14="http://schemas.microsoft.com/office/powerpoint/2010/main" val="2835110224"/>
       </p:ext>
     </p:extLst>
   </p:cSld>
@@ -8920,6 +8788,13 @@
   <p:clrMapOvr>
     <a:masterClrMapping/>
   </p:clrMapOvr>
+  <p:timing>
+    <p:tnLst>
+      <p:par>
+        <p:cTn id="1" dur="indefinite" restart="never" nodeType="tmRoot"/>
+      </p:par>
+    </p:tnLst>
+  </p:timing>
 </p:sld>
 </file>
 
@@ -9624,15 +9499,7 @@
               <a:pPr algn="ctr"/>
               <a:r>
                 <a:rPr lang="ru-RU" sz="2000" dirty="0" smtClean="0"/>
-                <a:t>Отметка </a:t>
-              </a:r>
-              <a:r>
-                <a:rPr lang="ru-RU" sz="2000" dirty="0" err="1" smtClean="0"/>
-                <a:t>нкжныых</a:t>
-              </a:r>
-              <a:r>
-                <a:rPr lang="ru-RU" sz="2000" dirty="0" smtClean="0"/>
-                <a:t> элементов в списке</a:t>
+                <a:t>Отметка нужных элементов в списке</a:t>
               </a:r>
               <a:endParaRPr lang="ru-RU" sz="2000" dirty="0">
                 <a:solidFill>
@@ -9923,7 +9790,7 @@
               <a:pPr algn="ctr"/>
               <a:r>
                 <a:rPr lang="ru-RU" sz="2000" dirty="0" smtClean="0"/>
-                <a:t>Сохранение списка</a:t>
+                <a:t>Сохранение  списка</a:t>
               </a:r>
               <a:endParaRPr lang="ru-RU" sz="2000" dirty="0"/>
             </a:p>
@@ -10056,7 +9923,7 @@
               <a:pPr algn="ctr"/>
               <a:r>
                 <a:rPr lang="ru-RU" sz="2000" dirty="0" smtClean="0"/>
-                <a:t>Удаление выделения со всех пунктов</a:t>
+                <a:t>Удаление      выделения    со всех          пунктов</a:t>
               </a:r>
               <a:endParaRPr lang="ru-RU" sz="2000" dirty="0">
                 <a:solidFill>
@@ -10177,6 +10044,13 @@
   <p:clrMapOvr>
     <a:masterClrMapping/>
   </p:clrMapOvr>
+  <p:timing>
+    <p:tnLst>
+      <p:par>
+        <p:cTn id="1" dur="indefinite" restart="never" nodeType="tmRoot"/>
+      </p:par>
+    </p:tnLst>
+  </p:timing>
 </p:sld>
 </file>
 
@@ -10255,36 +10129,6 @@
           </a:p>
         </p:txBody>
       </p:sp>
-      <p:sp>
-        <p:nvSpPr>
-          <p:cNvPr id="7" name="TextBox 6"/>
-          <p:cNvSpPr txBox="1"/>
-          <p:nvPr/>
-        </p:nvSpPr>
-        <p:spPr>
-          <a:xfrm>
-            <a:off x="7200900" y="1116624"/>
-            <a:ext cx="3727938" cy="1200329"/>
-          </a:xfrm>
-          <a:prstGeom prst="rect">
-            <a:avLst/>
-          </a:prstGeom>
-          <a:noFill/>
-        </p:spPr>
-        <p:txBody>
-          <a:bodyPr wrap="square" rtlCol="0">
-            <a:spAutoFit/>
-          </a:bodyPr>
-          <a:lstStyle/>
-          <a:p>
-            <a:r>
-              <a:rPr lang="ru-RU" dirty="0" smtClean="0"/>
-              <a:t>Результат: открывается окно с приложением с шаблоном Пляж в качестве начального варианта и пустыми полями в отметках</a:t>
-            </a:r>
-            <a:endParaRPr lang="ru-RU" dirty="0"/>
-          </a:p>
-        </p:txBody>
-      </p:sp>
     </p:spTree>
     <p:extLst>
       <p:ext uri="{BB962C8B-B14F-4D97-AF65-F5344CB8AC3E}">
@@ -10295,6 +10139,13 @@
   <p:clrMapOvr>
     <a:masterClrMapping/>
   </p:clrMapOvr>
+  <p:timing>
+    <p:tnLst>
+      <p:par>
+        <p:cTn id="1" dur="indefinite" restart="never" nodeType="tmRoot"/>
+      </p:par>
+    </p:tnLst>
+  </p:timing>
 </p:sld>
 </file>
 
@@ -10349,36 +10200,6 @@
           </a:p>
         </p:txBody>
       </p:sp>
-      <p:sp>
-        <p:nvSpPr>
-          <p:cNvPr id="7" name="TextBox 6"/>
-          <p:cNvSpPr txBox="1"/>
-          <p:nvPr/>
-        </p:nvSpPr>
-        <p:spPr>
-          <a:xfrm>
-            <a:off x="7200900" y="1116624"/>
-            <a:ext cx="3727938" cy="1200329"/>
-          </a:xfrm>
-          <a:prstGeom prst="rect">
-            <a:avLst/>
-          </a:prstGeom>
-          <a:noFill/>
-        </p:spPr>
-        <p:txBody>
-          <a:bodyPr wrap="square" rtlCol="0">
-            <a:spAutoFit/>
-          </a:bodyPr>
-          <a:lstStyle/>
-          <a:p>
-            <a:r>
-              <a:rPr lang="ru-RU" dirty="0" smtClean="0"/>
-              <a:t>Результат: открывается всплывающее окно с выбором из 4-х шаблонов, после нажатия на нужный шаблон открывается шаблон.</a:t>
-            </a:r>
-            <a:endParaRPr lang="ru-RU" dirty="0"/>
-          </a:p>
-        </p:txBody>
-      </p:sp>
       <p:pic>
         <p:nvPicPr>
           <p:cNvPr id="2" name="Рисунок 1"/>
@@ -10413,6 +10234,13 @@
   <p:clrMapOvr>
     <a:masterClrMapping/>
   </p:clrMapOvr>
+  <p:timing>
+    <p:tnLst>
+      <p:par>
+        <p:cTn id="1" dur="indefinite" restart="never" nodeType="tmRoot"/>
+      </p:par>
+    </p:tnLst>
+  </p:timing>
 </p:sld>
 </file>
 
